--- a/docs/BODHI_Mule_Hunter_Deck.pptx
+++ b/docs/BODHI_Mule_Hunter_Deck.pptx
@@ -4073,36 +4073,372 @@
         </p:nvSpPr>
         <p:spPr>
           <a:xfrm>
-            <a:off x="822960" y="5806440"/>
-            <a:ext cx="10515600" cy="365760"/>
-          </a:xfrm>
-          <a:prstGeom prst="rect">
-            <a:avLst/>
-          </a:prstGeom>
-          <a:noFill/>
-        </p:spPr>
-        <p:txBody>
-          <a:bodyPr wrap="square" anchor="t" lIns="0" rIns="0" tIns="0" bIns="0">
-            <a:spAutoFit/>
-          </a:bodyPr>
-          <a:lstStyle/>
-          <a:p>
-            <a:pPr algn="l">
-              <a:lnSpc>
-                <a:spcPct val="115000"/>
-              </a:lnSpc>
-              <a:spcAft>
-                <a:spcPts val="400"/>
-              </a:spcAft>
-            </a:pPr>
-            <a:r>
-              <a:rPr sz="1300" b="0">
+            <a:off x="822960" y="5596128"/>
+            <a:ext cx="2377440" cy="256032"/>
+          </a:xfrm>
+          <a:prstGeom prst="rect">
+            <a:avLst/>
+          </a:prstGeom>
+          <a:noFill/>
+        </p:spPr>
+        <p:txBody>
+          <a:bodyPr wrap="square" anchor="t" lIns="0" rIns="0" tIns="0" bIns="0">
+            <a:spAutoFit/>
+          </a:bodyPr>
+          <a:lstStyle/>
+          <a:p>
+            <a:pPr algn="l">
+              <a:lnSpc>
+                <a:spcPct val="115000"/>
+              </a:lnSpc>
+              <a:spcAft>
+                <a:spcPts val="400"/>
+              </a:spcAft>
+            </a:pPr>
+            <a:r>
+              <a:rPr sz="1300" b="1">
+                <a:solidFill>
+                  <a:srgbClr val="E6EDF7"/>
+                </a:solidFill>
+                <a:latin typeface="Segoe UI"/>
+              </a:rPr>
+              <a:t>Akshay Tiwari</a:t>
+            </a:r>
+          </a:p>
+        </p:txBody>
+      </p:sp>
+      <p:sp>
+        <p:nvSpPr>
+          <p:cNvPr id="25" name="TextBox 24"/>
+          <p:cNvSpPr txBox="1"/>
+          <p:nvPr/>
+        </p:nvSpPr>
+        <p:spPr>
+          <a:xfrm>
+            <a:off x="822960" y="5852160"/>
+            <a:ext cx="2377440" cy="237744"/>
+          </a:xfrm>
+          <a:prstGeom prst="rect">
+            <a:avLst/>
+          </a:prstGeom>
+          <a:noFill/>
+        </p:spPr>
+        <p:txBody>
+          <a:bodyPr wrap="square" anchor="t" lIns="0" rIns="0" tIns="0" bIns="0">
+            <a:spAutoFit/>
+          </a:bodyPr>
+          <a:lstStyle/>
+          <a:p>
+            <a:pPr algn="l">
+              <a:lnSpc>
+                <a:spcPct val="115000"/>
+              </a:lnSpc>
+              <a:spcAft>
+                <a:spcPts val="400"/>
+              </a:spcAft>
+            </a:pPr>
+            <a:r>
+              <a:rPr sz="1050" b="0">
                 <a:solidFill>
                   <a:srgbClr val="61708A"/>
                 </a:solidFill>
-                <a:latin typeface="Segoe UI"/>
-              </a:rPr>
-              <a:t>Team BODHI   ·   CyberShield Hackathon 2026   ·   Problem Statement 2   ·   Bank of India &amp; IIT Hyderabad</a:t>
+                <a:latin typeface="Consolas"/>
+              </a:rPr>
+              <a:t>0246CS241037</a:t>
+            </a:r>
+          </a:p>
+        </p:txBody>
+      </p:sp>
+      <p:sp>
+        <p:nvSpPr>
+          <p:cNvPr id="26" name="TextBox 25"/>
+          <p:cNvSpPr txBox="1"/>
+          <p:nvPr/>
+        </p:nvSpPr>
+        <p:spPr>
+          <a:xfrm>
+            <a:off x="3337560" y="5596128"/>
+            <a:ext cx="2377440" cy="256032"/>
+          </a:xfrm>
+          <a:prstGeom prst="rect">
+            <a:avLst/>
+          </a:prstGeom>
+          <a:noFill/>
+        </p:spPr>
+        <p:txBody>
+          <a:bodyPr wrap="square" anchor="t" lIns="0" rIns="0" tIns="0" bIns="0">
+            <a:spAutoFit/>
+          </a:bodyPr>
+          <a:lstStyle/>
+          <a:p>
+            <a:pPr algn="l">
+              <a:lnSpc>
+                <a:spcPct val="115000"/>
+              </a:lnSpc>
+              <a:spcAft>
+                <a:spcPts val="400"/>
+              </a:spcAft>
+            </a:pPr>
+            <a:r>
+              <a:rPr sz="1300" b="1">
+                <a:solidFill>
+                  <a:srgbClr val="E6EDF7"/>
+                </a:solidFill>
+                <a:latin typeface="Segoe UI"/>
+              </a:rPr>
+              <a:t>Palak Vishwakarma</a:t>
+            </a:r>
+          </a:p>
+        </p:txBody>
+      </p:sp>
+      <p:sp>
+        <p:nvSpPr>
+          <p:cNvPr id="27" name="TextBox 26"/>
+          <p:cNvSpPr txBox="1"/>
+          <p:nvPr/>
+        </p:nvSpPr>
+        <p:spPr>
+          <a:xfrm>
+            <a:off x="3337560" y="5852160"/>
+            <a:ext cx="2377440" cy="237744"/>
+          </a:xfrm>
+          <a:prstGeom prst="rect">
+            <a:avLst/>
+          </a:prstGeom>
+          <a:noFill/>
+        </p:spPr>
+        <p:txBody>
+          <a:bodyPr wrap="square" anchor="t" lIns="0" rIns="0" tIns="0" bIns="0">
+            <a:spAutoFit/>
+          </a:bodyPr>
+          <a:lstStyle/>
+          <a:p>
+            <a:pPr algn="l">
+              <a:lnSpc>
+                <a:spcPct val="115000"/>
+              </a:lnSpc>
+              <a:spcAft>
+                <a:spcPts val="400"/>
+              </a:spcAft>
+            </a:pPr>
+            <a:r>
+              <a:rPr sz="1050" b="0">
+                <a:solidFill>
+                  <a:srgbClr val="61708A"/>
+                </a:solidFill>
+                <a:latin typeface="Consolas"/>
+              </a:rPr>
+              <a:t>0246AL241124</a:t>
+            </a:r>
+          </a:p>
+        </p:txBody>
+      </p:sp>
+      <p:sp>
+        <p:nvSpPr>
+          <p:cNvPr id="28" name="TextBox 27"/>
+          <p:cNvSpPr txBox="1"/>
+          <p:nvPr/>
+        </p:nvSpPr>
+        <p:spPr>
+          <a:xfrm>
+            <a:off x="5852160" y="5596128"/>
+            <a:ext cx="2377440" cy="256032"/>
+          </a:xfrm>
+          <a:prstGeom prst="rect">
+            <a:avLst/>
+          </a:prstGeom>
+          <a:noFill/>
+        </p:spPr>
+        <p:txBody>
+          <a:bodyPr wrap="square" anchor="t" lIns="0" rIns="0" tIns="0" bIns="0">
+            <a:spAutoFit/>
+          </a:bodyPr>
+          <a:lstStyle/>
+          <a:p>
+            <a:pPr algn="l">
+              <a:lnSpc>
+                <a:spcPct val="115000"/>
+              </a:lnSpc>
+              <a:spcAft>
+                <a:spcPts val="400"/>
+              </a:spcAft>
+            </a:pPr>
+            <a:r>
+              <a:rPr sz="1300" b="1">
+                <a:solidFill>
+                  <a:srgbClr val="E6EDF7"/>
+                </a:solidFill>
+                <a:latin typeface="Segoe UI"/>
+              </a:rPr>
+              <a:t>Archi Singh Rajput</a:t>
+            </a:r>
+          </a:p>
+        </p:txBody>
+      </p:sp>
+      <p:sp>
+        <p:nvSpPr>
+          <p:cNvPr id="29" name="TextBox 28"/>
+          <p:cNvSpPr txBox="1"/>
+          <p:nvPr/>
+        </p:nvSpPr>
+        <p:spPr>
+          <a:xfrm>
+            <a:off x="5852160" y="5852160"/>
+            <a:ext cx="2377440" cy="237744"/>
+          </a:xfrm>
+          <a:prstGeom prst="rect">
+            <a:avLst/>
+          </a:prstGeom>
+          <a:noFill/>
+        </p:spPr>
+        <p:txBody>
+          <a:bodyPr wrap="square" anchor="t" lIns="0" rIns="0" tIns="0" bIns="0">
+            <a:spAutoFit/>
+          </a:bodyPr>
+          <a:lstStyle/>
+          <a:p>
+            <a:pPr algn="l">
+              <a:lnSpc>
+                <a:spcPct val="115000"/>
+              </a:lnSpc>
+              <a:spcAft>
+                <a:spcPts val="400"/>
+              </a:spcAft>
+            </a:pPr>
+            <a:r>
+              <a:rPr sz="1050" b="0">
+                <a:solidFill>
+                  <a:srgbClr val="61708A"/>
+                </a:solidFill>
+                <a:latin typeface="Consolas"/>
+              </a:rPr>
+              <a:t>0246CS240174</a:t>
+            </a:r>
+          </a:p>
+        </p:txBody>
+      </p:sp>
+      <p:sp>
+        <p:nvSpPr>
+          <p:cNvPr id="30" name="TextBox 29"/>
+          <p:cNvSpPr txBox="1"/>
+          <p:nvPr/>
+        </p:nvSpPr>
+        <p:spPr>
+          <a:xfrm>
+            <a:off x="8366760" y="5596128"/>
+            <a:ext cx="2377440" cy="256032"/>
+          </a:xfrm>
+          <a:prstGeom prst="rect">
+            <a:avLst/>
+          </a:prstGeom>
+          <a:noFill/>
+        </p:spPr>
+        <p:txBody>
+          <a:bodyPr wrap="square" anchor="t" lIns="0" rIns="0" tIns="0" bIns="0">
+            <a:spAutoFit/>
+          </a:bodyPr>
+          <a:lstStyle/>
+          <a:p>
+            <a:pPr algn="l">
+              <a:lnSpc>
+                <a:spcPct val="115000"/>
+              </a:lnSpc>
+              <a:spcAft>
+                <a:spcPts val="400"/>
+              </a:spcAft>
+            </a:pPr>
+            <a:r>
+              <a:rPr sz="1300" b="1">
+                <a:solidFill>
+                  <a:srgbClr val="E6EDF7"/>
+                </a:solidFill>
+                <a:latin typeface="Segoe UI"/>
+              </a:rPr>
+              <a:t>Kartik Jain</a:t>
+            </a:r>
+          </a:p>
+        </p:txBody>
+      </p:sp>
+      <p:sp>
+        <p:nvSpPr>
+          <p:cNvPr id="31" name="TextBox 30"/>
+          <p:cNvSpPr txBox="1"/>
+          <p:nvPr/>
+        </p:nvSpPr>
+        <p:spPr>
+          <a:xfrm>
+            <a:off x="8366760" y="5852160"/>
+            <a:ext cx="2377440" cy="237744"/>
+          </a:xfrm>
+          <a:prstGeom prst="rect">
+            <a:avLst/>
+          </a:prstGeom>
+          <a:noFill/>
+        </p:spPr>
+        <p:txBody>
+          <a:bodyPr wrap="square" anchor="t" lIns="0" rIns="0" tIns="0" bIns="0">
+            <a:spAutoFit/>
+          </a:bodyPr>
+          <a:lstStyle/>
+          <a:p>
+            <a:pPr algn="l">
+              <a:lnSpc>
+                <a:spcPct val="115000"/>
+              </a:lnSpc>
+              <a:spcAft>
+                <a:spcPts val="400"/>
+              </a:spcAft>
+            </a:pPr>
+            <a:r>
+              <a:rPr sz="1050" b="0">
+                <a:solidFill>
+                  <a:srgbClr val="61708A"/>
+                </a:solidFill>
+                <a:latin typeface="Consolas"/>
+              </a:rPr>
+              <a:t>0246AL241094</a:t>
+            </a:r>
+          </a:p>
+        </p:txBody>
+      </p:sp>
+      <p:sp>
+        <p:nvSpPr>
+          <p:cNvPr id="32" name="TextBox 31"/>
+          <p:cNvSpPr txBox="1"/>
+          <p:nvPr/>
+        </p:nvSpPr>
+        <p:spPr>
+          <a:xfrm>
+            <a:off x="822960" y="6272784"/>
+            <a:ext cx="10515600" cy="320040"/>
+          </a:xfrm>
+          <a:prstGeom prst="rect">
+            <a:avLst/>
+          </a:prstGeom>
+          <a:noFill/>
+        </p:spPr>
+        <p:txBody>
+          <a:bodyPr wrap="square" anchor="t" lIns="0" rIns="0" tIns="0" bIns="0">
+            <a:spAutoFit/>
+          </a:bodyPr>
+          <a:lstStyle/>
+          <a:p>
+            <a:pPr algn="l">
+              <a:lnSpc>
+                <a:spcPct val="115000"/>
+              </a:lnSpc>
+              <a:spcAft>
+                <a:spcPts val="400"/>
+              </a:spcAft>
+            </a:pPr>
+            <a:r>
+              <a:rPr sz="1100" b="0">
+                <a:solidFill>
+                  <a:srgbClr val="61708A"/>
+                </a:solidFill>
+                <a:latin typeface="Segoe UI"/>
+              </a:rPr>
+              <a:t>Team BODHI   ·   CyberShield Hackathon 2026 - Problem Statement 2   ·   In association with Bank of India and IIT Hyderabad</a:t>
             </a:r>
           </a:p>
         </p:txBody>
@@ -12191,30 +12527,366 @@
         </p:nvSpPr>
         <p:spPr>
           <a:xfrm>
-            <a:off x="822960" y="5852160"/>
-            <a:ext cx="10515600" cy="457200"/>
-          </a:xfrm>
-          <a:prstGeom prst="rect">
-            <a:avLst/>
-          </a:prstGeom>
-          <a:noFill/>
-        </p:spPr>
-        <p:txBody>
-          <a:bodyPr wrap="square" anchor="t" lIns="0" rIns="0" tIns="0" bIns="0">
-            <a:spAutoFit/>
-          </a:bodyPr>
-          <a:lstStyle/>
-          <a:p>
-            <a:pPr algn="l">
-              <a:lnSpc>
-                <a:spcPct val="115000"/>
-              </a:lnSpc>
-              <a:spcAft>
-                <a:spcPts val="400"/>
-              </a:spcAft>
-            </a:pPr>
-            <a:r>
-              <a:rPr sz="1300" b="0">
+            <a:off x="822960" y="5742432"/>
+            <a:ext cx="2377440" cy="256032"/>
+          </a:xfrm>
+          <a:prstGeom prst="rect">
+            <a:avLst/>
+          </a:prstGeom>
+          <a:noFill/>
+        </p:spPr>
+        <p:txBody>
+          <a:bodyPr wrap="square" anchor="t" lIns="0" rIns="0" tIns="0" bIns="0">
+            <a:spAutoFit/>
+          </a:bodyPr>
+          <a:lstStyle/>
+          <a:p>
+            <a:pPr algn="l">
+              <a:lnSpc>
+                <a:spcPct val="115000"/>
+              </a:lnSpc>
+              <a:spcAft>
+                <a:spcPts val="400"/>
+              </a:spcAft>
+            </a:pPr>
+            <a:r>
+              <a:rPr sz="1250" b="1">
+                <a:solidFill>
+                  <a:srgbClr val="E6EDF7"/>
+                </a:solidFill>
+                <a:latin typeface="Segoe UI"/>
+              </a:rPr>
+              <a:t>Akshay Tiwari</a:t>
+            </a:r>
+          </a:p>
+        </p:txBody>
+      </p:sp>
+      <p:sp>
+        <p:nvSpPr>
+          <p:cNvPr id="20" name="TextBox 19"/>
+          <p:cNvSpPr txBox="1"/>
+          <p:nvPr/>
+        </p:nvSpPr>
+        <p:spPr>
+          <a:xfrm>
+            <a:off x="822960" y="5989320"/>
+            <a:ext cx="2377440" cy="237744"/>
+          </a:xfrm>
+          <a:prstGeom prst="rect">
+            <a:avLst/>
+          </a:prstGeom>
+          <a:noFill/>
+        </p:spPr>
+        <p:txBody>
+          <a:bodyPr wrap="square" anchor="t" lIns="0" rIns="0" tIns="0" bIns="0">
+            <a:spAutoFit/>
+          </a:bodyPr>
+          <a:lstStyle/>
+          <a:p>
+            <a:pPr algn="l">
+              <a:lnSpc>
+                <a:spcPct val="115000"/>
+              </a:lnSpc>
+              <a:spcAft>
+                <a:spcPts val="400"/>
+              </a:spcAft>
+            </a:pPr>
+            <a:r>
+              <a:rPr sz="1000" b="0">
+                <a:solidFill>
+                  <a:srgbClr val="61708A"/>
+                </a:solidFill>
+                <a:latin typeface="Consolas"/>
+              </a:rPr>
+              <a:t>0246CS241037</a:t>
+            </a:r>
+          </a:p>
+        </p:txBody>
+      </p:sp>
+      <p:sp>
+        <p:nvSpPr>
+          <p:cNvPr id="21" name="TextBox 20"/>
+          <p:cNvSpPr txBox="1"/>
+          <p:nvPr/>
+        </p:nvSpPr>
+        <p:spPr>
+          <a:xfrm>
+            <a:off x="3337560" y="5742432"/>
+            <a:ext cx="2377440" cy="256032"/>
+          </a:xfrm>
+          <a:prstGeom prst="rect">
+            <a:avLst/>
+          </a:prstGeom>
+          <a:noFill/>
+        </p:spPr>
+        <p:txBody>
+          <a:bodyPr wrap="square" anchor="t" lIns="0" rIns="0" tIns="0" bIns="0">
+            <a:spAutoFit/>
+          </a:bodyPr>
+          <a:lstStyle/>
+          <a:p>
+            <a:pPr algn="l">
+              <a:lnSpc>
+                <a:spcPct val="115000"/>
+              </a:lnSpc>
+              <a:spcAft>
+                <a:spcPts val="400"/>
+              </a:spcAft>
+            </a:pPr>
+            <a:r>
+              <a:rPr sz="1250" b="1">
+                <a:solidFill>
+                  <a:srgbClr val="E6EDF7"/>
+                </a:solidFill>
+                <a:latin typeface="Segoe UI"/>
+              </a:rPr>
+              <a:t>Palak Vishwakarma</a:t>
+            </a:r>
+          </a:p>
+        </p:txBody>
+      </p:sp>
+      <p:sp>
+        <p:nvSpPr>
+          <p:cNvPr id="22" name="TextBox 21"/>
+          <p:cNvSpPr txBox="1"/>
+          <p:nvPr/>
+        </p:nvSpPr>
+        <p:spPr>
+          <a:xfrm>
+            <a:off x="3337560" y="5989320"/>
+            <a:ext cx="2377440" cy="237744"/>
+          </a:xfrm>
+          <a:prstGeom prst="rect">
+            <a:avLst/>
+          </a:prstGeom>
+          <a:noFill/>
+        </p:spPr>
+        <p:txBody>
+          <a:bodyPr wrap="square" anchor="t" lIns="0" rIns="0" tIns="0" bIns="0">
+            <a:spAutoFit/>
+          </a:bodyPr>
+          <a:lstStyle/>
+          <a:p>
+            <a:pPr algn="l">
+              <a:lnSpc>
+                <a:spcPct val="115000"/>
+              </a:lnSpc>
+              <a:spcAft>
+                <a:spcPts val="400"/>
+              </a:spcAft>
+            </a:pPr>
+            <a:r>
+              <a:rPr sz="1000" b="0">
+                <a:solidFill>
+                  <a:srgbClr val="61708A"/>
+                </a:solidFill>
+                <a:latin typeface="Consolas"/>
+              </a:rPr>
+              <a:t>0246AL241124</a:t>
+            </a:r>
+          </a:p>
+        </p:txBody>
+      </p:sp>
+      <p:sp>
+        <p:nvSpPr>
+          <p:cNvPr id="23" name="TextBox 22"/>
+          <p:cNvSpPr txBox="1"/>
+          <p:nvPr/>
+        </p:nvSpPr>
+        <p:spPr>
+          <a:xfrm>
+            <a:off x="5852160" y="5742432"/>
+            <a:ext cx="2377440" cy="256032"/>
+          </a:xfrm>
+          <a:prstGeom prst="rect">
+            <a:avLst/>
+          </a:prstGeom>
+          <a:noFill/>
+        </p:spPr>
+        <p:txBody>
+          <a:bodyPr wrap="square" anchor="t" lIns="0" rIns="0" tIns="0" bIns="0">
+            <a:spAutoFit/>
+          </a:bodyPr>
+          <a:lstStyle/>
+          <a:p>
+            <a:pPr algn="l">
+              <a:lnSpc>
+                <a:spcPct val="115000"/>
+              </a:lnSpc>
+              <a:spcAft>
+                <a:spcPts val="400"/>
+              </a:spcAft>
+            </a:pPr>
+            <a:r>
+              <a:rPr sz="1250" b="1">
+                <a:solidFill>
+                  <a:srgbClr val="E6EDF7"/>
+                </a:solidFill>
+                <a:latin typeface="Segoe UI"/>
+              </a:rPr>
+              <a:t>Archi Singh Rajput</a:t>
+            </a:r>
+          </a:p>
+        </p:txBody>
+      </p:sp>
+      <p:sp>
+        <p:nvSpPr>
+          <p:cNvPr id="24" name="TextBox 23"/>
+          <p:cNvSpPr txBox="1"/>
+          <p:nvPr/>
+        </p:nvSpPr>
+        <p:spPr>
+          <a:xfrm>
+            <a:off x="5852160" y="5989320"/>
+            <a:ext cx="2377440" cy="237744"/>
+          </a:xfrm>
+          <a:prstGeom prst="rect">
+            <a:avLst/>
+          </a:prstGeom>
+          <a:noFill/>
+        </p:spPr>
+        <p:txBody>
+          <a:bodyPr wrap="square" anchor="t" lIns="0" rIns="0" tIns="0" bIns="0">
+            <a:spAutoFit/>
+          </a:bodyPr>
+          <a:lstStyle/>
+          <a:p>
+            <a:pPr algn="l">
+              <a:lnSpc>
+                <a:spcPct val="115000"/>
+              </a:lnSpc>
+              <a:spcAft>
+                <a:spcPts val="400"/>
+              </a:spcAft>
+            </a:pPr>
+            <a:r>
+              <a:rPr sz="1000" b="0">
+                <a:solidFill>
+                  <a:srgbClr val="61708A"/>
+                </a:solidFill>
+                <a:latin typeface="Consolas"/>
+              </a:rPr>
+              <a:t>0246CS240174</a:t>
+            </a:r>
+          </a:p>
+        </p:txBody>
+      </p:sp>
+      <p:sp>
+        <p:nvSpPr>
+          <p:cNvPr id="25" name="TextBox 24"/>
+          <p:cNvSpPr txBox="1"/>
+          <p:nvPr/>
+        </p:nvSpPr>
+        <p:spPr>
+          <a:xfrm>
+            <a:off x="8366760" y="5742432"/>
+            <a:ext cx="2377440" cy="256032"/>
+          </a:xfrm>
+          <a:prstGeom prst="rect">
+            <a:avLst/>
+          </a:prstGeom>
+          <a:noFill/>
+        </p:spPr>
+        <p:txBody>
+          <a:bodyPr wrap="square" anchor="t" lIns="0" rIns="0" tIns="0" bIns="0">
+            <a:spAutoFit/>
+          </a:bodyPr>
+          <a:lstStyle/>
+          <a:p>
+            <a:pPr algn="l">
+              <a:lnSpc>
+                <a:spcPct val="115000"/>
+              </a:lnSpc>
+              <a:spcAft>
+                <a:spcPts val="400"/>
+              </a:spcAft>
+            </a:pPr>
+            <a:r>
+              <a:rPr sz="1250" b="1">
+                <a:solidFill>
+                  <a:srgbClr val="E6EDF7"/>
+                </a:solidFill>
+                <a:latin typeface="Segoe UI"/>
+              </a:rPr>
+              <a:t>Kartik Jain</a:t>
+            </a:r>
+          </a:p>
+        </p:txBody>
+      </p:sp>
+      <p:sp>
+        <p:nvSpPr>
+          <p:cNvPr id="26" name="TextBox 25"/>
+          <p:cNvSpPr txBox="1"/>
+          <p:nvPr/>
+        </p:nvSpPr>
+        <p:spPr>
+          <a:xfrm>
+            <a:off x="8366760" y="5989320"/>
+            <a:ext cx="2377440" cy="237744"/>
+          </a:xfrm>
+          <a:prstGeom prst="rect">
+            <a:avLst/>
+          </a:prstGeom>
+          <a:noFill/>
+        </p:spPr>
+        <p:txBody>
+          <a:bodyPr wrap="square" anchor="t" lIns="0" rIns="0" tIns="0" bIns="0">
+            <a:spAutoFit/>
+          </a:bodyPr>
+          <a:lstStyle/>
+          <a:p>
+            <a:pPr algn="l">
+              <a:lnSpc>
+                <a:spcPct val="115000"/>
+              </a:lnSpc>
+              <a:spcAft>
+                <a:spcPts val="400"/>
+              </a:spcAft>
+            </a:pPr>
+            <a:r>
+              <a:rPr sz="1000" b="0">
+                <a:solidFill>
+                  <a:srgbClr val="61708A"/>
+                </a:solidFill>
+                <a:latin typeface="Consolas"/>
+              </a:rPr>
+              <a:t>0246AL241094</a:t>
+            </a:r>
+          </a:p>
+        </p:txBody>
+      </p:sp>
+      <p:sp>
+        <p:nvSpPr>
+          <p:cNvPr id="27" name="TextBox 26"/>
+          <p:cNvSpPr txBox="1"/>
+          <p:nvPr/>
+        </p:nvSpPr>
+        <p:spPr>
+          <a:xfrm>
+            <a:off x="822960" y="6382512"/>
+            <a:ext cx="10515600" cy="320040"/>
+          </a:xfrm>
+          <a:prstGeom prst="rect">
+            <a:avLst/>
+          </a:prstGeom>
+          <a:noFill/>
+        </p:spPr>
+        <p:txBody>
+          <a:bodyPr wrap="square" anchor="t" lIns="0" rIns="0" tIns="0" bIns="0">
+            <a:spAutoFit/>
+          </a:bodyPr>
+          <a:lstStyle/>
+          <a:p>
+            <a:pPr algn="l">
+              <a:lnSpc>
+                <a:spcPct val="115000"/>
+              </a:lnSpc>
+              <a:spcAft>
+                <a:spcPts val="400"/>
+              </a:spcAft>
+            </a:pPr>
+            <a:r>
+              <a:rPr sz="1100" b="0">
                 <a:solidFill>
                   <a:srgbClr val="61708A"/>
                 </a:solidFill>

--- a/docs/BODHI_Mule_Hunter_Deck.pptx
+++ b/docs/BODHI_Mule_Hunter_Deck.pptx
@@ -23,6 +23,7 @@
     <p:sldId id="271" r:id="rId22"/>
     <p:sldId id="272" r:id="rId23"/>
     <p:sldId id="273" r:id="rId24"/>
+    <p:sldId id="274" r:id="rId25"/>
   </p:sldIdLst>
   <p:sldSz cx="12191695" cy="6858000" type="screen4x3"/>
   <p:notesSz cx="6858000" cy="9144000"/>
@@ -6316,7 +6317,7 @@
                 </a:solidFill>
                 <a:latin typeface="Segoe UI"/>
               </a:rPr>
-              <a:t>10 / 18</a:t>
+              <a:t>10 / 19</a:t>
             </a:r>
           </a:p>
         </p:txBody>
@@ -6661,7 +6662,7 @@
                 </a:solidFill>
                 <a:latin typeface="Segoe UI"/>
               </a:rPr>
-              <a:t>11 / 18</a:t>
+              <a:t>11 / 19</a:t>
             </a:r>
           </a:p>
         </p:txBody>
@@ -7077,7 +7078,7 @@
                 </a:solidFill>
                 <a:latin typeface="Segoe UI"/>
               </a:rPr>
-              <a:t>12 / 18</a:t>
+              <a:t>12 / 19</a:t>
             </a:r>
           </a:p>
         </p:txBody>
@@ -7555,7 +7556,7 @@
                 </a:solidFill>
                 <a:latin typeface="Segoe UI"/>
               </a:rPr>
-              <a:t>13 / 18</a:t>
+              <a:t>13 / 19</a:t>
             </a:r>
           </a:p>
         </p:txBody>
@@ -8602,7 +8603,7 @@
                 </a:solidFill>
                 <a:latin typeface="Segoe UI"/>
               </a:rPr>
-              <a:t>14 / 18</a:t>
+              <a:t>14 / 19</a:t>
             </a:r>
           </a:p>
         </p:txBody>
@@ -9451,7 +9452,7 @@
                 </a:solidFill>
                 <a:latin typeface="Segoe UI"/>
               </a:rPr>
-              <a:t>15 / 18</a:t>
+              <a:t>15 / 19</a:t>
             </a:r>
           </a:p>
         </p:txBody>
@@ -10975,7 +10976,7 @@
                 </a:solidFill>
                 <a:latin typeface="Segoe UI"/>
               </a:rPr>
-              <a:t>16 / 18</a:t>
+              <a:t>16 / 19</a:t>
             </a:r>
           </a:p>
         </p:txBody>
@@ -11079,7 +11080,7 @@
                 </a:solidFill>
                 <a:latin typeface="Segoe UI"/>
               </a:rPr>
-              <a:t>LIMITATIONS</a:t>
+              <a:t>THEIR DATASET</a:t>
             </a:r>
           </a:p>
         </p:txBody>
@@ -11121,14 +11122,56 @@
                 </a:solidFill>
                 <a:latin typeface="Segoe UI"/>
               </a:rPr>
-              <a:t>Stated plainly, because hiding them helps nobody</a:t>
-            </a:r>
-          </a:p>
-        </p:txBody>
-      </p:sp>
-      <p:sp>
-        <p:nvSpPr>
-          <p:cNvPr id="5" name="Rectangle 4"/>
+              <a:t>Built on the schema they published</a:t>
+            </a:r>
+          </a:p>
+        </p:txBody>
+      </p:sp>
+      <p:sp>
+        <p:nvSpPr>
+          <p:cNvPr id="5" name="TextBox 4"/>
+          <p:cNvSpPr txBox="1"/>
+          <p:nvPr/>
+        </p:nvSpPr>
+        <p:spPr>
+          <a:xfrm>
+            <a:off x="640080" y="1298448"/>
+            <a:ext cx="10881360" cy="457200"/>
+          </a:xfrm>
+          <a:prstGeom prst="rect">
+            <a:avLst/>
+          </a:prstGeom>
+          <a:noFill/>
+        </p:spPr>
+        <p:txBody>
+          <a:bodyPr wrap="square" anchor="t" lIns="0" rIns="0" tIns="0" bIns="0">
+            <a:spAutoFit/>
+          </a:bodyPr>
+          <a:lstStyle/>
+          <a:p>
+            <a:pPr algn="l">
+              <a:lnSpc>
+                <a:spcPct val="125000"/>
+              </a:lnSpc>
+              <a:spcAft>
+                <a:spcPts val="400"/>
+              </a:spcAft>
+            </a:pPr>
+            <a:r>
+              <a:rPr sz="1400" b="0">
+                <a:solidFill>
+                  <a:srgbClr val="8FA3C0"/>
+                </a:solidFill>
+                <a:latin typeface="Segoe UI"/>
+              </a:rPr>
+              <a:t>3,924 declared columns, one row per alert. The names are machine-generated from a grammar, so we parse them instead of treating them as opaque.</a:t>
+            </a:r>
+          </a:p>
+        </p:txBody>
+      </p:sp>
+      <p:sp>
+        <p:nvSpPr>
+          <p:cNvPr id="6" name="Rectangle 5"/>
           <p:cNvSpPr/>
           <p:nvPr/>
         </p:nvSpPr>
@@ -11172,71 +11215,119 @@
       </p:sp>
       <p:sp>
         <p:nvSpPr>
-          <p:cNvPr id="6" name="TextBox 5"/>
-          <p:cNvSpPr txBox="1"/>
-          <p:nvPr/>
-        </p:nvSpPr>
-        <p:spPr>
-          <a:xfrm>
-            <a:off x="640080" y="1389888"/>
-            <a:ext cx="3108960" cy="320040"/>
-          </a:xfrm>
-          <a:prstGeom prst="rect">
-            <a:avLst/>
-          </a:prstGeom>
-          <a:noFill/>
-        </p:spPr>
-        <p:txBody>
-          <a:bodyPr wrap="square" anchor="t" lIns="0" rIns="0" tIns="0" bIns="0">
-            <a:spAutoFit/>
-          </a:bodyPr>
-          <a:lstStyle/>
-          <a:p>
-            <a:pPr algn="l">
-              <a:lnSpc>
-                <a:spcPct val="115000"/>
-              </a:lnSpc>
-              <a:spcAft>
-                <a:spcPts val="400"/>
-              </a:spcAft>
-            </a:pPr>
-            <a:r>
-              <a:rPr sz="1350" b="1">
-                <a:solidFill>
-                  <a:srgbClr val="FF8C42"/>
-                </a:solidFill>
-                <a:latin typeface="Segoe UI"/>
-              </a:rPr>
-              <a:t>Simulated data</a:t>
-            </a:r>
-          </a:p>
-        </p:txBody>
-      </p:sp>
-      <p:sp>
-        <p:nvSpPr>
-          <p:cNvPr id="7" name="TextBox 6"/>
-          <p:cNvSpPr txBox="1"/>
-          <p:nvPr/>
-        </p:nvSpPr>
-        <p:spPr>
-          <a:xfrm>
-            <a:off x="3931920" y="1389888"/>
-            <a:ext cx="7589520" cy="548640"/>
-          </a:xfrm>
-          <a:prstGeom prst="rect">
-            <a:avLst/>
-          </a:prstGeom>
-          <a:noFill/>
-        </p:spPr>
-        <p:txBody>
-          <a:bodyPr wrap="square" anchor="t" lIns="0" rIns="0" tIns="0" bIns="0">
-            <a:spAutoFit/>
-          </a:bodyPr>
-          <a:lstStyle/>
-          <a:p>
-            <a:pPr algn="l">
-              <a:lnSpc>
-                <a:spcPct val="125000"/>
+          <p:cNvPr id="7" name="Rounded Rectangle 6"/>
+          <p:cNvSpPr/>
+          <p:nvPr/>
+        </p:nvSpPr>
+        <p:spPr>
+          <a:xfrm>
+            <a:off x="640080" y="1965960"/>
+            <a:ext cx="5394960" cy="2240280"/>
+          </a:xfrm>
+          <a:prstGeom prst="roundRect">
+            <a:avLst>
+              <a:gd name="adj" fmla="val 4000"/>
+            </a:avLst>
+          </a:prstGeom>
+          <a:solidFill>
+            <a:srgbClr val="182031"/>
+          </a:solidFill>
+          <a:ln w="19050">
+            <a:solidFill>
+              <a:srgbClr val="FF4D5E"/>
+            </a:solidFill>
+          </a:ln>
+          <a:effectLst/>
+        </p:spPr>
+        <p:style>
+          <a:lnRef idx="1">
+            <a:schemeClr val="accent1"/>
+          </a:lnRef>
+          <a:fillRef idx="3">
+            <a:schemeClr val="accent1"/>
+          </a:fillRef>
+          <a:effectRef idx="2">
+            <a:schemeClr val="accent1"/>
+          </a:effectRef>
+          <a:fontRef idx="minor">
+            <a:schemeClr val="lt1"/>
+          </a:fontRef>
+        </p:style>
+        <p:txBody>
+          <a:bodyPr rtlCol="0" anchor="ctr"/>
+          <a:lstStyle/>
+          <a:p>
+            <a:pPr algn="ctr"/>
+          </a:p>
+        </p:txBody>
+      </p:sp>
+      <p:sp>
+        <p:nvSpPr>
+          <p:cNvPr id="8" name="TextBox 7"/>
+          <p:cNvSpPr txBox="1"/>
+          <p:nvPr/>
+        </p:nvSpPr>
+        <p:spPr>
+          <a:xfrm>
+            <a:off x="914400" y="2103120"/>
+            <a:ext cx="4846320" cy="274320"/>
+          </a:xfrm>
+          <a:prstGeom prst="rect">
+            <a:avLst/>
+          </a:prstGeom>
+          <a:noFill/>
+        </p:spPr>
+        <p:txBody>
+          <a:bodyPr wrap="square" anchor="t" lIns="0" rIns="0" tIns="0" bIns="0">
+            <a:spAutoFit/>
+          </a:bodyPr>
+          <a:lstStyle/>
+          <a:p>
+            <a:pPr algn="l">
+              <a:lnSpc>
+                <a:spcPct val="115000"/>
+              </a:lnSpc>
+              <a:spcAft>
+                <a:spcPts val="400"/>
+              </a:spcAft>
+            </a:pPr>
+            <a:r>
+              <a:rPr sz="1100" b="1">
+                <a:solidFill>
+                  <a:srgbClr val="FF4D5E"/>
+                </a:solidFill>
+                <a:latin typeface="Segoe UI"/>
+              </a:rPr>
+              <a:t>FOUR COLUMNS LEAK THE LABEL</a:t>
+            </a:r>
+          </a:p>
+        </p:txBody>
+      </p:sp>
+      <p:sp>
+        <p:nvSpPr>
+          <p:cNvPr id="9" name="TextBox 8"/>
+          <p:cNvSpPr txBox="1"/>
+          <p:nvPr/>
+        </p:nvSpPr>
+        <p:spPr>
+          <a:xfrm>
+            <a:off x="914400" y="2441448"/>
+            <a:ext cx="4846320" cy="822960"/>
+          </a:xfrm>
+          <a:prstGeom prst="rect">
+            <a:avLst/>
+          </a:prstGeom>
+          <a:noFill/>
+        </p:spPr>
+        <p:txBody>
+          <a:bodyPr wrap="square" anchor="t" lIns="0" rIns="0" tIns="0" bIns="0">
+            <a:spAutoFit/>
+          </a:bodyPr>
+          <a:lstStyle/>
+          <a:p>
+            <a:pPr algn="l">
+              <a:lnSpc>
+                <a:spcPct val="130000"/>
               </a:lnSpc>
               <a:spcAft>
                 <a:spcPts val="400"/>
@@ -11249,133 +11340,49 @@
                 </a:solidFill>
                 <a:latin typeface="Segoe UI"/>
               </a:rPr>
-              <a:t>Demonstrates the architecture beats a rule engine on data with realistic decoys. Not a forecast of production performance.</a:t>
-            </a:r>
-          </a:p>
-        </p:txBody>
-      </p:sp>
-      <p:sp>
-        <p:nvSpPr>
-          <p:cNvPr id="8" name="TextBox 7"/>
-          <p:cNvSpPr txBox="1"/>
-          <p:nvPr/>
-        </p:nvSpPr>
-        <p:spPr>
-          <a:xfrm>
-            <a:off x="640080" y="2103120"/>
-            <a:ext cx="3108960" cy="320040"/>
-          </a:xfrm>
-          <a:prstGeom prst="rect">
-            <a:avLst/>
-          </a:prstGeom>
-          <a:noFill/>
-        </p:spPr>
-        <p:txBody>
-          <a:bodyPr wrap="square" anchor="t" lIns="0" rIns="0" tIns="0" bIns="0">
-            <a:spAutoFit/>
-          </a:bodyPr>
-          <a:lstStyle/>
-          <a:p>
-            <a:pPr algn="l">
-              <a:lnSpc>
-                <a:spcPct val="115000"/>
-              </a:lnSpc>
-              <a:spcAft>
-                <a:spcPts val="400"/>
-              </a:spcAft>
-            </a:pPr>
-            <a:r>
-              <a:rPr sz="1350" b="1">
-                <a:solidFill>
-                  <a:srgbClr val="FF8C42"/>
-                </a:solidFill>
-                <a:latin typeface="Segoe UI"/>
-              </a:rPr>
-              <a:t>Static APK analysis only</a:t>
-            </a:r>
-          </a:p>
-        </p:txBody>
-      </p:sp>
-      <p:sp>
-        <p:nvSpPr>
-          <p:cNvPr id="9" name="TextBox 8"/>
-          <p:cNvSpPr txBox="1"/>
-          <p:nvPr/>
-        </p:nvSpPr>
-        <p:spPr>
-          <a:xfrm>
-            <a:off x="3931920" y="2103120"/>
-            <a:ext cx="7589520" cy="548640"/>
-          </a:xfrm>
-          <a:prstGeom prst="rect">
-            <a:avLst/>
-          </a:prstGeom>
-          <a:noFill/>
-        </p:spPr>
-        <p:txBody>
-          <a:bodyPr wrap="square" anchor="t" lIns="0" rIns="0" tIns="0" bIns="0">
-            <a:spAutoFit/>
-          </a:bodyPr>
-          <a:lstStyle/>
-          <a:p>
-            <a:pPr algn="l">
-              <a:lnSpc>
-                <a:spcPct val="125000"/>
-              </a:lnSpc>
-              <a:spcAft>
-                <a:spcPts val="400"/>
-              </a:spcAft>
-            </a:pPr>
-            <a:r>
-              <a:rPr sz="1250" b="0">
+              <a:t>FRAUD_SUSPECTED · FALSE_POSITIVE · OTHER_RESOLUTION · UNATTENDED are resolution-status flags — how an analyst closed the alert. An open alert has none of them.</a:t>
+            </a:r>
+          </a:p>
+        </p:txBody>
+      </p:sp>
+      <p:sp>
+        <p:nvSpPr>
+          <p:cNvPr id="10" name="TextBox 9"/>
+          <p:cNvSpPr txBox="1"/>
+          <p:nvPr/>
+        </p:nvSpPr>
+        <p:spPr>
+          <a:xfrm>
+            <a:off x="914400" y="3319272"/>
+            <a:ext cx="3566160" cy="292608"/>
+          </a:xfrm>
+          <a:prstGeom prst="rect">
+            <a:avLst/>
+          </a:prstGeom>
+          <a:noFill/>
+        </p:spPr>
+        <p:txBody>
+          <a:bodyPr wrap="square" anchor="t" lIns="0" rIns="0" tIns="0" bIns="0">
+            <a:spAutoFit/>
+          </a:bodyPr>
+          <a:lstStyle/>
+          <a:p>
+            <a:pPr algn="l">
+              <a:lnSpc>
+                <a:spcPct val="115000"/>
+              </a:lnSpc>
+              <a:spcAft>
+                <a:spcPts val="400"/>
+              </a:spcAft>
+            </a:pPr>
+            <a:r>
+              <a:rPr sz="1200" b="0">
                 <a:solidFill>
                   <a:srgbClr val="8FA3C0"/>
                 </a:solidFill>
                 <a:latin typeface="Segoe UI"/>
               </a:rPr>
-              <a:t>The dynamic sandbox with runtime hooking needs an instrumented Android image; it cannot ship self-contained.</a:t>
-            </a:r>
-          </a:p>
-        </p:txBody>
-      </p:sp>
-      <p:sp>
-        <p:nvSpPr>
-          <p:cNvPr id="10" name="TextBox 9"/>
-          <p:cNvSpPr txBox="1"/>
-          <p:nvPr/>
-        </p:nvSpPr>
-        <p:spPr>
-          <a:xfrm>
-            <a:off x="640080" y="2816352"/>
-            <a:ext cx="3108960" cy="320040"/>
-          </a:xfrm>
-          <a:prstGeom prst="rect">
-            <a:avLst/>
-          </a:prstGeom>
-          <a:noFill/>
-        </p:spPr>
-        <p:txBody>
-          <a:bodyPr wrap="square" anchor="t" lIns="0" rIns="0" tIns="0" bIns="0">
-            <a:spAutoFit/>
-          </a:bodyPr>
-          <a:lstStyle/>
-          <a:p>
-            <a:pPr algn="l">
-              <a:lnSpc>
-                <a:spcPct val="115000"/>
-              </a:lnSpc>
-              <a:spcAft>
-                <a:spcPts val="400"/>
-              </a:spcAft>
-            </a:pPr>
-            <a:r>
-              <a:rPr sz="1350" b="1">
-                <a:solidFill>
-                  <a:srgbClr val="FF8C42"/>
-                </a:solidFill>
-                <a:latin typeface="Segoe UI"/>
-              </a:rPr>
-              <a:t>Graph layers are not real-time</a:t>
+              <a:t>PR-AUC, quarantined (deployable)</a:t>
             </a:r>
           </a:p>
         </p:txBody>
@@ -11388,78 +11395,78 @@
         </p:nvSpPr>
         <p:spPr>
           <a:xfrm>
-            <a:off x="3931920" y="2816352"/>
-            <a:ext cx="7589520" cy="548640"/>
-          </a:xfrm>
-          <a:prstGeom prst="rect">
-            <a:avLst/>
-          </a:prstGeom>
-          <a:noFill/>
-        </p:spPr>
-        <p:txBody>
-          <a:bodyPr wrap="square" anchor="t" lIns="0" rIns="0" tIns="0" bIns="0">
-            <a:spAutoFit/>
-          </a:bodyPr>
-          <a:lstStyle/>
-          <a:p>
-            <a:pPr algn="l">
-              <a:lnSpc>
-                <a:spcPct val="125000"/>
-              </a:lnSpc>
-              <a:spcAft>
-                <a:spcPts val="400"/>
-              </a:spcAft>
-            </a:pPr>
-            <a:r>
-              <a:rPr sz="1250" b="0">
+            <a:off x="4480560" y="3319272"/>
+            <a:ext cx="1280160" cy="292608"/>
+          </a:xfrm>
+          <a:prstGeom prst="rect">
+            <a:avLst/>
+          </a:prstGeom>
+          <a:noFill/>
+        </p:spPr>
+        <p:txBody>
+          <a:bodyPr wrap="square" anchor="t" lIns="0" rIns="0" tIns="0" bIns="0">
+            <a:spAutoFit/>
+          </a:bodyPr>
+          <a:lstStyle/>
+          <a:p>
+            <a:pPr algn="r">
+              <a:lnSpc>
+                <a:spcPct val="115000"/>
+              </a:lnSpc>
+              <a:spcAft>
+                <a:spcPts val="400"/>
+              </a:spcAft>
+            </a:pPr>
+            <a:r>
+              <a:rPr sz="1600" b="1">
+                <a:solidFill>
+                  <a:srgbClr val="2ECC9B"/>
+                </a:solidFill>
+                <a:latin typeface="Consolas"/>
+              </a:rPr>
+              <a:t>0.177</a:t>
+            </a:r>
+          </a:p>
+        </p:txBody>
+      </p:sp>
+      <p:sp>
+        <p:nvSpPr>
+          <p:cNvPr id="12" name="TextBox 11"/>
+          <p:cNvSpPr txBox="1"/>
+          <p:nvPr/>
+        </p:nvSpPr>
+        <p:spPr>
+          <a:xfrm>
+            <a:off x="914400" y="3666744"/>
+            <a:ext cx="3566160" cy="292608"/>
+          </a:xfrm>
+          <a:prstGeom prst="rect">
+            <a:avLst/>
+          </a:prstGeom>
+          <a:noFill/>
+        </p:spPr>
+        <p:txBody>
+          <a:bodyPr wrap="square" anchor="t" lIns="0" rIns="0" tIns="0" bIns="0">
+            <a:spAutoFit/>
+          </a:bodyPr>
+          <a:lstStyle/>
+          <a:p>
+            <a:pPr algn="l">
+              <a:lnSpc>
+                <a:spcPct val="115000"/>
+              </a:lnSpc>
+              <a:spcAft>
+                <a:spcPts val="400"/>
+              </a:spcAft>
+            </a:pPr>
+            <a:r>
+              <a:rPr sz="1200" b="0">
                 <a:solidFill>
                   <a:srgbClr val="8FA3C0"/>
                 </a:solidFill>
                 <a:latin typeface="Segoe UI"/>
               </a:rPr>
-              <a:t>~38 s full re-score. An account whose neighbourhood changed since the last batch is scored on slightly stale structure.</a:t>
-            </a:r>
-          </a:p>
-        </p:txBody>
-      </p:sp>
-      <p:sp>
-        <p:nvSpPr>
-          <p:cNvPr id="12" name="TextBox 11"/>
-          <p:cNvSpPr txBox="1"/>
-          <p:nvPr/>
-        </p:nvSpPr>
-        <p:spPr>
-          <a:xfrm>
-            <a:off x="640080" y="3529584"/>
-            <a:ext cx="3108960" cy="320040"/>
-          </a:xfrm>
-          <a:prstGeom prst="rect">
-            <a:avLst/>
-          </a:prstGeom>
-          <a:noFill/>
-        </p:spPr>
-        <p:txBody>
-          <a:bodyPr wrap="square" anchor="t" lIns="0" rIns="0" tIns="0" bIns="0">
-            <a:spAutoFit/>
-          </a:bodyPr>
-          <a:lstStyle/>
-          <a:p>
-            <a:pPr algn="l">
-              <a:lnSpc>
-                <a:spcPct val="115000"/>
-              </a:lnSpc>
-              <a:spcAft>
-                <a:spcPts val="400"/>
-              </a:spcAft>
-            </a:pPr>
-            <a:r>
-              <a:rPr sz="1350" b="1">
-                <a:solidFill>
-                  <a:srgbClr val="FF8C42"/>
-                </a:solidFill>
-                <a:latin typeface="Segoe UI"/>
-              </a:rPr>
-              <a:t>Single-institution view</a:t>
+              <a:t>PR-AUC, resolution columns admitted</a:t>
             </a:r>
           </a:p>
         </p:txBody>
@@ -11472,211 +11479,1629 @@
         </p:nvSpPr>
         <p:spPr>
           <a:xfrm>
-            <a:off x="3931920" y="3529584"/>
-            <a:ext cx="7589520" cy="548640"/>
-          </a:xfrm>
-          <a:prstGeom prst="rect">
-            <a:avLst/>
-          </a:prstGeom>
-          <a:noFill/>
-        </p:spPr>
-        <p:txBody>
-          <a:bodyPr wrap="square" anchor="t" lIns="0" rIns="0" tIns="0" bIns="0">
-            <a:spAutoFit/>
-          </a:bodyPr>
-          <a:lstStyle/>
-          <a:p>
-            <a:pPr algn="l">
-              <a:lnSpc>
-                <a:spcPct val="125000"/>
-              </a:lnSpc>
-              <a:spcAft>
-                <a:spcPts val="400"/>
-              </a:spcAft>
-            </a:pPr>
-            <a:r>
-              <a:rPr sz="1250" b="0">
+            <a:off x="4480560" y="3666744"/>
+            <a:ext cx="1280160" cy="292608"/>
+          </a:xfrm>
+          <a:prstGeom prst="rect">
+            <a:avLst/>
+          </a:prstGeom>
+          <a:noFill/>
+        </p:spPr>
+        <p:txBody>
+          <a:bodyPr wrap="square" anchor="t" lIns="0" rIns="0" tIns="0" bIns="0">
+            <a:spAutoFit/>
+          </a:bodyPr>
+          <a:lstStyle/>
+          <a:p>
+            <a:pPr algn="r">
+              <a:lnSpc>
+                <a:spcPct val="115000"/>
+              </a:lnSpc>
+              <a:spcAft>
+                <a:spcPts val="400"/>
+              </a:spcAft>
+            </a:pPr>
+            <a:r>
+              <a:rPr sz="1600" b="1">
+                <a:solidFill>
+                  <a:srgbClr val="FF4D5E"/>
+                </a:solidFill>
+                <a:latin typeface="Consolas"/>
+              </a:rPr>
+              <a:t>0.972</a:t>
+            </a:r>
+          </a:p>
+        </p:txBody>
+      </p:sp>
+      <p:sp>
+        <p:nvSpPr>
+          <p:cNvPr id="14" name="TextBox 13"/>
+          <p:cNvSpPr txBox="1"/>
+          <p:nvPr/>
+        </p:nvSpPr>
+        <p:spPr>
+          <a:xfrm>
+            <a:off x="6400800" y="1965960"/>
+            <a:ext cx="5120640" cy="274320"/>
+          </a:xfrm>
+          <a:prstGeom prst="rect">
+            <a:avLst/>
+          </a:prstGeom>
+          <a:noFill/>
+        </p:spPr>
+        <p:txBody>
+          <a:bodyPr wrap="square" anchor="t" lIns="0" rIns="0" tIns="0" bIns="0">
+            <a:spAutoFit/>
+          </a:bodyPr>
+          <a:lstStyle/>
+          <a:p>
+            <a:pPr algn="l">
+              <a:lnSpc>
+                <a:spcPct val="115000"/>
+              </a:lnSpc>
+              <a:spcAft>
+                <a:spcPts val="400"/>
+              </a:spcAft>
+            </a:pPr>
+            <a:r>
+              <a:rPr sz="1100" b="1">
+                <a:solidFill>
+                  <a:srgbClr val="61708A"/>
+                </a:solidFill>
+                <a:latin typeface="Segoe UI"/>
+              </a:rPr>
+              <a:t>FOUR STRATEGIES, SELECTION INSIDE EVERY FOLD</a:t>
+            </a:r>
+          </a:p>
+        </p:txBody>
+      </p:sp>
+      <p:sp>
+        <p:nvSpPr>
+          <p:cNvPr id="15" name="TextBox 14"/>
+          <p:cNvSpPr txBox="1"/>
+          <p:nvPr/>
+        </p:nvSpPr>
+        <p:spPr>
+          <a:xfrm>
+            <a:off x="6400800" y="2313432"/>
+            <a:ext cx="2103120" cy="274320"/>
+          </a:xfrm>
+          <a:prstGeom prst="rect">
+            <a:avLst/>
+          </a:prstGeom>
+          <a:noFill/>
+        </p:spPr>
+        <p:txBody>
+          <a:bodyPr wrap="square" anchor="t" lIns="0" rIns="0" tIns="0" bIns="0">
+            <a:spAutoFit/>
+          </a:bodyPr>
+          <a:lstStyle/>
+          <a:p>
+            <a:pPr algn="l">
+              <a:lnSpc>
+                <a:spcPct val="115000"/>
+              </a:lnSpc>
+              <a:spcAft>
+                <a:spcPts val="400"/>
+              </a:spcAft>
+            </a:pPr>
+            <a:r>
+              <a:rPr sz="950" b="1">
+                <a:solidFill>
+                  <a:srgbClr val="61708A"/>
+                </a:solidFill>
+                <a:latin typeface="Segoe UI"/>
+              </a:rPr>
+              <a:t>STRATEGY</a:t>
+            </a:r>
+          </a:p>
+        </p:txBody>
+      </p:sp>
+      <p:sp>
+        <p:nvSpPr>
+          <p:cNvPr id="16" name="TextBox 15"/>
+          <p:cNvSpPr txBox="1"/>
+          <p:nvPr/>
+        </p:nvSpPr>
+        <p:spPr>
+          <a:xfrm>
+            <a:off x="8503920" y="2313432"/>
+            <a:ext cx="914400" cy="274320"/>
+          </a:xfrm>
+          <a:prstGeom prst="rect">
+            <a:avLst/>
+          </a:prstGeom>
+          <a:noFill/>
+        </p:spPr>
+        <p:txBody>
+          <a:bodyPr wrap="square" anchor="t" lIns="0" rIns="0" tIns="0" bIns="0">
+            <a:spAutoFit/>
+          </a:bodyPr>
+          <a:lstStyle/>
+          <a:p>
+            <a:pPr algn="r">
+              <a:lnSpc>
+                <a:spcPct val="115000"/>
+              </a:lnSpc>
+              <a:spcAft>
+                <a:spcPts val="400"/>
+              </a:spcAft>
+            </a:pPr>
+            <a:r>
+              <a:rPr sz="950" b="1">
+                <a:solidFill>
+                  <a:srgbClr val="61708A"/>
+                </a:solidFill>
+                <a:latin typeface="Segoe UI"/>
+              </a:rPr>
+              <a:t>FEATS</a:t>
+            </a:r>
+          </a:p>
+        </p:txBody>
+      </p:sp>
+      <p:sp>
+        <p:nvSpPr>
+          <p:cNvPr id="17" name="TextBox 16"/>
+          <p:cNvSpPr txBox="1"/>
+          <p:nvPr/>
+        </p:nvSpPr>
+        <p:spPr>
+          <a:xfrm>
+            <a:off x="9418320" y="2313432"/>
+            <a:ext cx="1051560" cy="274320"/>
+          </a:xfrm>
+          <a:prstGeom prst="rect">
+            <a:avLst/>
+          </a:prstGeom>
+          <a:noFill/>
+        </p:spPr>
+        <p:txBody>
+          <a:bodyPr wrap="square" anchor="t" lIns="0" rIns="0" tIns="0" bIns="0">
+            <a:spAutoFit/>
+          </a:bodyPr>
+          <a:lstStyle/>
+          <a:p>
+            <a:pPr algn="r">
+              <a:lnSpc>
+                <a:spcPct val="115000"/>
+              </a:lnSpc>
+              <a:spcAft>
+                <a:spcPts val="400"/>
+              </a:spcAft>
+            </a:pPr>
+            <a:r>
+              <a:rPr sz="950" b="1">
+                <a:solidFill>
+                  <a:srgbClr val="61708A"/>
+                </a:solidFill>
+                <a:latin typeface="Segoe UI"/>
+              </a:rPr>
+              <a:t>ROC-AUC</a:t>
+            </a:r>
+          </a:p>
+        </p:txBody>
+      </p:sp>
+      <p:sp>
+        <p:nvSpPr>
+          <p:cNvPr id="18" name="TextBox 17"/>
+          <p:cNvSpPr txBox="1"/>
+          <p:nvPr/>
+        </p:nvSpPr>
+        <p:spPr>
+          <a:xfrm>
+            <a:off x="10469880" y="2313432"/>
+            <a:ext cx="1051560" cy="274320"/>
+          </a:xfrm>
+          <a:prstGeom prst="rect">
+            <a:avLst/>
+          </a:prstGeom>
+          <a:noFill/>
+        </p:spPr>
+        <p:txBody>
+          <a:bodyPr wrap="square" anchor="t" lIns="0" rIns="0" tIns="0" bIns="0">
+            <a:spAutoFit/>
+          </a:bodyPr>
+          <a:lstStyle/>
+          <a:p>
+            <a:pPr algn="r">
+              <a:lnSpc>
+                <a:spcPct val="115000"/>
+              </a:lnSpc>
+              <a:spcAft>
+                <a:spcPts val="400"/>
+              </a:spcAft>
+            </a:pPr>
+            <a:r>
+              <a:rPr sz="950" b="1">
+                <a:solidFill>
+                  <a:srgbClr val="61708A"/>
+                </a:solidFill>
+                <a:latin typeface="Segoe UI"/>
+              </a:rPr>
+              <a:t>PR-AUC</a:t>
+            </a:r>
+          </a:p>
+        </p:txBody>
+      </p:sp>
+      <p:sp>
+        <p:nvSpPr>
+          <p:cNvPr id="19" name="Rectangle 18"/>
+          <p:cNvSpPr/>
+          <p:nvPr/>
+        </p:nvSpPr>
+        <p:spPr>
+          <a:xfrm>
+            <a:off x="6400800" y="2569464"/>
+            <a:ext cx="5120640" cy="12700"/>
+          </a:xfrm>
+          <a:prstGeom prst="rect">
+            <a:avLst/>
+          </a:prstGeom>
+          <a:solidFill>
+            <a:srgbClr val="23304A"/>
+          </a:solidFill>
+          <a:ln>
+            <a:noFill/>
+          </a:ln>
+          <a:effectLst/>
+        </p:spPr>
+        <p:style>
+          <a:lnRef idx="1">
+            <a:schemeClr val="accent1"/>
+          </a:lnRef>
+          <a:fillRef idx="3">
+            <a:schemeClr val="accent1"/>
+          </a:fillRef>
+          <a:effectRef idx="2">
+            <a:schemeClr val="accent1"/>
+          </a:effectRef>
+          <a:fontRef idx="minor">
+            <a:schemeClr val="lt1"/>
+          </a:fontRef>
+        </p:style>
+        <p:txBody>
+          <a:bodyPr rtlCol="0" anchor="ctr"/>
+          <a:lstStyle/>
+          <a:p>
+            <a:pPr algn="ctr"/>
+          </a:p>
+        </p:txBody>
+      </p:sp>
+      <p:sp>
+        <p:nvSpPr>
+          <p:cNvPr id="20" name="TextBox 19"/>
+          <p:cNvSpPr txBox="1"/>
+          <p:nvPr/>
+        </p:nvSpPr>
+        <p:spPr>
+          <a:xfrm>
+            <a:off x="6400800" y="2679192"/>
+            <a:ext cx="2103120" cy="347472"/>
+          </a:xfrm>
+          <a:prstGeom prst="rect">
+            <a:avLst/>
+          </a:prstGeom>
+          <a:noFill/>
+        </p:spPr>
+        <p:txBody>
+          <a:bodyPr wrap="square" anchor="t" lIns="0" rIns="0" tIns="0" bIns="0">
+            <a:spAutoFit/>
+          </a:bodyPr>
+          <a:lstStyle/>
+          <a:p>
+            <a:pPr algn="l">
+              <a:lnSpc>
+                <a:spcPct val="115000"/>
+              </a:lnSpc>
+              <a:spcAft>
+                <a:spcPts val="400"/>
+              </a:spcAft>
+            </a:pPr>
+            <a:r>
+              <a:rPr sz="1200" b="0">
+                <a:solidFill>
+                  <a:srgbClr val="E6EDF7"/>
+                </a:solidFill>
+                <a:latin typeface="Segoe UI"/>
+              </a:rPr>
+              <a:t>Bank's 18 finalised</a:t>
+            </a:r>
+          </a:p>
+        </p:txBody>
+      </p:sp>
+      <p:sp>
+        <p:nvSpPr>
+          <p:cNvPr id="21" name="TextBox 20"/>
+          <p:cNvSpPr txBox="1"/>
+          <p:nvPr/>
+        </p:nvSpPr>
+        <p:spPr>
+          <a:xfrm>
+            <a:off x="8503920" y="2679192"/>
+            <a:ext cx="914400" cy="347472"/>
+          </a:xfrm>
+          <a:prstGeom prst="rect">
+            <a:avLst/>
+          </a:prstGeom>
+          <a:noFill/>
+        </p:spPr>
+        <p:txBody>
+          <a:bodyPr wrap="square" anchor="t" lIns="0" rIns="0" tIns="0" bIns="0">
+            <a:spAutoFit/>
+          </a:bodyPr>
+          <a:lstStyle/>
+          <a:p>
+            <a:pPr algn="r">
+              <a:lnSpc>
+                <a:spcPct val="115000"/>
+              </a:lnSpc>
+              <a:spcAft>
+                <a:spcPts val="400"/>
+              </a:spcAft>
+            </a:pPr>
+            <a:r>
+              <a:rPr sz="1200" b="0">
                 <a:solidFill>
                   <a:srgbClr val="8FA3C0"/>
                 </a:solidFill>
                 <a:latin typeface="Segoe UI"/>
               </a:rPr>
-              <a:t>Rings routing through several banks are only partly visible — a data-sharing problem, not a modelling one.</a:t>
-            </a:r>
-          </a:p>
-        </p:txBody>
-      </p:sp>
-      <p:sp>
-        <p:nvSpPr>
-          <p:cNvPr id="14" name="TextBox 13"/>
-          <p:cNvSpPr txBox="1"/>
-          <p:nvPr/>
-        </p:nvSpPr>
-        <p:spPr>
-          <a:xfrm>
-            <a:off x="640080" y="4242816"/>
-            <a:ext cx="3108960" cy="320040"/>
-          </a:xfrm>
-          <a:prstGeom prst="rect">
-            <a:avLst/>
-          </a:prstGeom>
-          <a:noFill/>
-        </p:spPr>
-        <p:txBody>
-          <a:bodyPr wrap="square" anchor="t" lIns="0" rIns="0" tIns="0" bIns="0">
-            <a:spAutoFit/>
-          </a:bodyPr>
-          <a:lstStyle/>
-          <a:p>
-            <a:pPr algn="l">
-              <a:lnSpc>
-                <a:spcPct val="115000"/>
-              </a:lnSpc>
-              <a:spcAft>
-                <a:spcPts val="400"/>
-              </a:spcAft>
-            </a:pPr>
-            <a:r>
-              <a:rPr sz="1350" b="1">
-                <a:solidFill>
-                  <a:srgbClr val="FF8C42"/>
-                </a:solidFill>
-                <a:latin typeface="Segoe UI"/>
-              </a:rPr>
-              <a:t>Cold start</a:t>
-            </a:r>
-          </a:p>
-        </p:txBody>
-      </p:sp>
-      <p:sp>
-        <p:nvSpPr>
-          <p:cNvPr id="15" name="TextBox 14"/>
-          <p:cNvSpPr txBox="1"/>
-          <p:nvPr/>
-        </p:nvSpPr>
-        <p:spPr>
-          <a:xfrm>
-            <a:off x="3931920" y="4242816"/>
-            <a:ext cx="7589520" cy="548640"/>
-          </a:xfrm>
-          <a:prstGeom prst="rect">
-            <a:avLst/>
-          </a:prstGeom>
-          <a:noFill/>
-        </p:spPr>
-        <p:txBody>
-          <a:bodyPr wrap="square" anchor="t" lIns="0" rIns="0" tIns="0" bIns="0">
-            <a:spAutoFit/>
-          </a:bodyPr>
-          <a:lstStyle/>
-          <a:p>
-            <a:pPr algn="l">
-              <a:lnSpc>
-                <a:spcPct val="125000"/>
-              </a:lnSpc>
-              <a:spcAft>
-                <a:spcPts val="400"/>
-              </a:spcAft>
-            </a:pPr>
-            <a:r>
-              <a:rPr sz="1250" b="0">
+              <a:t>18</a:t>
+            </a:r>
+          </a:p>
+        </p:txBody>
+      </p:sp>
+      <p:sp>
+        <p:nvSpPr>
+          <p:cNvPr id="22" name="TextBox 21"/>
+          <p:cNvSpPr txBox="1"/>
+          <p:nvPr/>
+        </p:nvSpPr>
+        <p:spPr>
+          <a:xfrm>
+            <a:off x="9418320" y="2679192"/>
+            <a:ext cx="1051560" cy="347472"/>
+          </a:xfrm>
+          <a:prstGeom prst="rect">
+            <a:avLst/>
+          </a:prstGeom>
+          <a:noFill/>
+        </p:spPr>
+        <p:txBody>
+          <a:bodyPr wrap="square" anchor="t" lIns="0" rIns="0" tIns="0" bIns="0">
+            <a:spAutoFit/>
+          </a:bodyPr>
+          <a:lstStyle/>
+          <a:p>
+            <a:pPr algn="r">
+              <a:lnSpc>
+                <a:spcPct val="115000"/>
+              </a:lnSpc>
+              <a:spcAft>
+                <a:spcPts val="400"/>
+              </a:spcAft>
+            </a:pPr>
+            <a:r>
+              <a:rPr sz="1200" b="0">
                 <a:solidFill>
                   <a:srgbClr val="8FA3C0"/>
                 </a:solidFill>
                 <a:latin typeface="Segoe UI"/>
               </a:rPr>
-              <a:t>The strongest feature is neighbourhood risk propagated from confirmed cases; with zero known mules performance drops materially.</a:t>
-            </a:r>
-          </a:p>
-        </p:txBody>
-      </p:sp>
-      <p:sp>
-        <p:nvSpPr>
-          <p:cNvPr id="16" name="TextBox 15"/>
-          <p:cNvSpPr txBox="1"/>
-          <p:nvPr/>
-        </p:nvSpPr>
-        <p:spPr>
-          <a:xfrm>
-            <a:off x="640080" y="4956048"/>
-            <a:ext cx="3108960" cy="320040"/>
-          </a:xfrm>
-          <a:prstGeom prst="rect">
-            <a:avLst/>
-          </a:prstGeom>
-          <a:noFill/>
-        </p:spPr>
-        <p:txBody>
-          <a:bodyPr wrap="square" anchor="t" lIns="0" rIns="0" tIns="0" bIns="0">
-            <a:spAutoFit/>
-          </a:bodyPr>
-          <a:lstStyle/>
-          <a:p>
-            <a:pPr algn="l">
-              <a:lnSpc>
-                <a:spcPct val="115000"/>
-              </a:lnSpc>
-              <a:spcAft>
-                <a:spcPts val="400"/>
-              </a:spcAft>
-            </a:pPr>
-            <a:r>
-              <a:rPr sz="1350" b="1">
-                <a:solidFill>
-                  <a:srgbClr val="FF8C42"/>
-                </a:solidFill>
-                <a:latin typeface="Segoe UI"/>
-              </a:rPr>
-              <a:t>Disparate impact unevaluated</a:t>
-            </a:r>
-          </a:p>
-        </p:txBody>
-      </p:sp>
-      <p:sp>
-        <p:nvSpPr>
-          <p:cNvPr id="17" name="TextBox 16"/>
-          <p:cNvSpPr txBox="1"/>
-          <p:nvPr/>
-        </p:nvSpPr>
-        <p:spPr>
-          <a:xfrm>
-            <a:off x="3931920" y="4956048"/>
-            <a:ext cx="7589520" cy="548640"/>
-          </a:xfrm>
-          <a:prstGeom prst="rect">
-            <a:avLst/>
-          </a:prstGeom>
-          <a:noFill/>
-        </p:spPr>
-        <p:txBody>
-          <a:bodyPr wrap="square" anchor="t" lIns="0" rIns="0" tIns="0" bIns="0">
-            <a:spAutoFit/>
-          </a:bodyPr>
-          <a:lstStyle/>
-          <a:p>
-            <a:pPr algn="l">
-              <a:lnSpc>
-                <a:spcPct val="125000"/>
-              </a:lnSpc>
-              <a:spcAft>
-                <a:spcPts val="400"/>
-              </a:spcAft>
-            </a:pPr>
-            <a:r>
-              <a:rPr sz="1250" b="0">
+              <a:t>0.712</a:t>
+            </a:r>
+          </a:p>
+        </p:txBody>
+      </p:sp>
+      <p:sp>
+        <p:nvSpPr>
+          <p:cNvPr id="23" name="TextBox 22"/>
+          <p:cNvSpPr txBox="1"/>
+          <p:nvPr/>
+        </p:nvSpPr>
+        <p:spPr>
+          <a:xfrm>
+            <a:off x="10469880" y="2679192"/>
+            <a:ext cx="1051560" cy="347472"/>
+          </a:xfrm>
+          <a:prstGeom prst="rect">
+            <a:avLst/>
+          </a:prstGeom>
+          <a:noFill/>
+        </p:spPr>
+        <p:txBody>
+          <a:bodyPr wrap="square" anchor="t" lIns="0" rIns="0" tIns="0" bIns="0">
+            <a:spAutoFit/>
+          </a:bodyPr>
+          <a:lstStyle/>
+          <a:p>
+            <a:pPr algn="r">
+              <a:lnSpc>
+                <a:spcPct val="115000"/>
+              </a:lnSpc>
+              <a:spcAft>
+                <a:spcPts val="400"/>
+              </a:spcAft>
+            </a:pPr>
+            <a:r>
+              <a:rPr sz="1200" b="0">
                 <a:solidFill>
                   <a:srgbClr val="8FA3C0"/>
                 </a:solidFill>
                 <a:latin typeface="Segoe UI"/>
               </a:rPr>
-              <a:t>Minimum-KYC and shared-device features are predictive but correlate with lower-income households. Alert-rate parity must be measured before go-live.</a:t>
-            </a:r>
-          </a:p>
-        </p:txBody>
-      </p:sp>
-      <p:sp>
-        <p:nvSpPr>
-          <p:cNvPr id="18" name="TextBox 17"/>
+              <a:t>0.177</a:t>
+            </a:r>
+          </a:p>
+        </p:txBody>
+      </p:sp>
+      <p:sp>
+        <p:nvSpPr>
+          <p:cNvPr id="24" name="TextBox 23"/>
+          <p:cNvSpPr txBox="1"/>
+          <p:nvPr/>
+        </p:nvSpPr>
+        <p:spPr>
+          <a:xfrm>
+            <a:off x="6400800" y="3026664"/>
+            <a:ext cx="2103120" cy="347472"/>
+          </a:xfrm>
+          <a:prstGeom prst="rect">
+            <a:avLst/>
+          </a:prstGeom>
+          <a:noFill/>
+        </p:spPr>
+        <p:txBody>
+          <a:bodyPr wrap="square" anchor="t" lIns="0" rIns="0" tIns="0" bIns="0">
+            <a:spAutoFit/>
+          </a:bodyPr>
+          <a:lstStyle/>
+          <a:p>
+            <a:pPr algn="l">
+              <a:lnSpc>
+                <a:spcPct val="115000"/>
+              </a:lnSpc>
+              <a:spcAft>
+                <a:spcPts val="400"/>
+              </a:spcAft>
+            </a:pPr>
+            <a:r>
+              <a:rPr sz="1200" b="0">
+                <a:solidFill>
+                  <a:srgbClr val="E6EDF7"/>
+                </a:solidFill>
+                <a:latin typeface="Segoe UI"/>
+              </a:rPr>
+              <a:t>Bank + engineered</a:t>
+            </a:r>
+          </a:p>
+        </p:txBody>
+      </p:sp>
+      <p:sp>
+        <p:nvSpPr>
+          <p:cNvPr id="25" name="TextBox 24"/>
+          <p:cNvSpPr txBox="1"/>
+          <p:nvPr/>
+        </p:nvSpPr>
+        <p:spPr>
+          <a:xfrm>
+            <a:off x="8503920" y="3026664"/>
+            <a:ext cx="914400" cy="347472"/>
+          </a:xfrm>
+          <a:prstGeom prst="rect">
+            <a:avLst/>
+          </a:prstGeom>
+          <a:noFill/>
+        </p:spPr>
+        <p:txBody>
+          <a:bodyPr wrap="square" anchor="t" lIns="0" rIns="0" tIns="0" bIns="0">
+            <a:spAutoFit/>
+          </a:bodyPr>
+          <a:lstStyle/>
+          <a:p>
+            <a:pPr algn="r">
+              <a:lnSpc>
+                <a:spcPct val="115000"/>
+              </a:lnSpc>
+              <a:spcAft>
+                <a:spcPts val="400"/>
+              </a:spcAft>
+            </a:pPr>
+            <a:r>
+              <a:rPr sz="1200" b="0">
+                <a:solidFill>
+                  <a:srgbClr val="8FA3C0"/>
+                </a:solidFill>
+                <a:latin typeface="Segoe UI"/>
+              </a:rPr>
+              <a:t>2,028</a:t>
+            </a:r>
+          </a:p>
+        </p:txBody>
+      </p:sp>
+      <p:sp>
+        <p:nvSpPr>
+          <p:cNvPr id="26" name="TextBox 25"/>
+          <p:cNvSpPr txBox="1"/>
+          <p:nvPr/>
+        </p:nvSpPr>
+        <p:spPr>
+          <a:xfrm>
+            <a:off x="9418320" y="3026664"/>
+            <a:ext cx="1051560" cy="347472"/>
+          </a:xfrm>
+          <a:prstGeom prst="rect">
+            <a:avLst/>
+          </a:prstGeom>
+          <a:noFill/>
+        </p:spPr>
+        <p:txBody>
+          <a:bodyPr wrap="square" anchor="t" lIns="0" rIns="0" tIns="0" bIns="0">
+            <a:spAutoFit/>
+          </a:bodyPr>
+          <a:lstStyle/>
+          <a:p>
+            <a:pPr algn="r">
+              <a:lnSpc>
+                <a:spcPct val="115000"/>
+              </a:lnSpc>
+              <a:spcAft>
+                <a:spcPts val="400"/>
+              </a:spcAft>
+            </a:pPr>
+            <a:r>
+              <a:rPr sz="1200" b="0">
+                <a:solidFill>
+                  <a:srgbClr val="8FA3C0"/>
+                </a:solidFill>
+                <a:latin typeface="Segoe UI"/>
+              </a:rPr>
+              <a:t>0.651</a:t>
+            </a:r>
+          </a:p>
+        </p:txBody>
+      </p:sp>
+      <p:sp>
+        <p:nvSpPr>
+          <p:cNvPr id="27" name="TextBox 26"/>
+          <p:cNvSpPr txBox="1"/>
+          <p:nvPr/>
+        </p:nvSpPr>
+        <p:spPr>
+          <a:xfrm>
+            <a:off x="10469880" y="3026664"/>
+            <a:ext cx="1051560" cy="347472"/>
+          </a:xfrm>
+          <a:prstGeom prst="rect">
+            <a:avLst/>
+          </a:prstGeom>
+          <a:noFill/>
+        </p:spPr>
+        <p:txBody>
+          <a:bodyPr wrap="square" anchor="t" lIns="0" rIns="0" tIns="0" bIns="0">
+            <a:spAutoFit/>
+          </a:bodyPr>
+          <a:lstStyle/>
+          <a:p>
+            <a:pPr algn="r">
+              <a:lnSpc>
+                <a:spcPct val="115000"/>
+              </a:lnSpc>
+              <a:spcAft>
+                <a:spcPts val="400"/>
+              </a:spcAft>
+            </a:pPr>
+            <a:r>
+              <a:rPr sz="1200" b="0">
+                <a:solidFill>
+                  <a:srgbClr val="8FA3C0"/>
+                </a:solidFill>
+                <a:latin typeface="Segoe UI"/>
+              </a:rPr>
+              <a:t>0.163</a:t>
+            </a:r>
+          </a:p>
+        </p:txBody>
+      </p:sp>
+      <p:sp>
+        <p:nvSpPr>
+          <p:cNvPr id="28" name="TextBox 27"/>
+          <p:cNvSpPr txBox="1"/>
+          <p:nvPr/>
+        </p:nvSpPr>
+        <p:spPr>
+          <a:xfrm>
+            <a:off x="6400800" y="3374136"/>
+            <a:ext cx="2103120" cy="347472"/>
+          </a:xfrm>
+          <a:prstGeom prst="rect">
+            <a:avLst/>
+          </a:prstGeom>
+          <a:noFill/>
+        </p:spPr>
+        <p:txBody>
+          <a:bodyPr wrap="square" anchor="t" lIns="0" rIns="0" tIns="0" bIns="0">
+            <a:spAutoFit/>
+          </a:bodyPr>
+          <a:lstStyle/>
+          <a:p>
+            <a:pPr algn="l">
+              <a:lnSpc>
+                <a:spcPct val="115000"/>
+              </a:lnSpc>
+              <a:spcAft>
+                <a:spcPts val="400"/>
+              </a:spcAft>
+            </a:pPr>
+            <a:r>
+              <a:rPr sz="1200" b="0">
+                <a:solidFill>
+                  <a:srgbClr val="E6EDF7"/>
+                </a:solidFill>
+                <a:latin typeface="Segoe UI"/>
+              </a:rPr>
+              <a:t>Automatic top-k</a:t>
+            </a:r>
+          </a:p>
+        </p:txBody>
+      </p:sp>
+      <p:sp>
+        <p:nvSpPr>
+          <p:cNvPr id="29" name="TextBox 28"/>
+          <p:cNvSpPr txBox="1"/>
+          <p:nvPr/>
+        </p:nvSpPr>
+        <p:spPr>
+          <a:xfrm>
+            <a:off x="8503920" y="3374136"/>
+            <a:ext cx="914400" cy="347472"/>
+          </a:xfrm>
+          <a:prstGeom prst="rect">
+            <a:avLst/>
+          </a:prstGeom>
+          <a:noFill/>
+        </p:spPr>
+        <p:txBody>
+          <a:bodyPr wrap="square" anchor="t" lIns="0" rIns="0" tIns="0" bIns="0">
+            <a:spAutoFit/>
+          </a:bodyPr>
+          <a:lstStyle/>
+          <a:p>
+            <a:pPr algn="r">
+              <a:lnSpc>
+                <a:spcPct val="115000"/>
+              </a:lnSpc>
+              <a:spcAft>
+                <a:spcPts val="400"/>
+              </a:spcAft>
+            </a:pPr>
+            <a:r>
+              <a:rPr sz="1200" b="0">
+                <a:solidFill>
+                  <a:srgbClr val="8FA3C0"/>
+                </a:solidFill>
+                <a:latin typeface="Segoe UI"/>
+              </a:rPr>
+              <a:t>131</a:t>
+            </a:r>
+          </a:p>
+        </p:txBody>
+      </p:sp>
+      <p:sp>
+        <p:nvSpPr>
+          <p:cNvPr id="30" name="TextBox 29"/>
+          <p:cNvSpPr txBox="1"/>
+          <p:nvPr/>
+        </p:nvSpPr>
+        <p:spPr>
+          <a:xfrm>
+            <a:off x="9418320" y="3374136"/>
+            <a:ext cx="1051560" cy="347472"/>
+          </a:xfrm>
+          <a:prstGeom prst="rect">
+            <a:avLst/>
+          </a:prstGeom>
+          <a:noFill/>
+        </p:spPr>
+        <p:txBody>
+          <a:bodyPr wrap="square" anchor="t" lIns="0" rIns="0" tIns="0" bIns="0">
+            <a:spAutoFit/>
+          </a:bodyPr>
+          <a:lstStyle/>
+          <a:p>
+            <a:pPr algn="r">
+              <a:lnSpc>
+                <a:spcPct val="115000"/>
+              </a:lnSpc>
+              <a:spcAft>
+                <a:spcPts val="400"/>
+              </a:spcAft>
+            </a:pPr>
+            <a:r>
+              <a:rPr sz="1200" b="0">
+                <a:solidFill>
+                  <a:srgbClr val="8FA3C0"/>
+                </a:solidFill>
+                <a:latin typeface="Segoe UI"/>
+              </a:rPr>
+              <a:t>0.622</a:t>
+            </a:r>
+          </a:p>
+        </p:txBody>
+      </p:sp>
+      <p:sp>
+        <p:nvSpPr>
+          <p:cNvPr id="31" name="TextBox 30"/>
+          <p:cNvSpPr txBox="1"/>
+          <p:nvPr/>
+        </p:nvSpPr>
+        <p:spPr>
+          <a:xfrm>
+            <a:off x="10469880" y="3374136"/>
+            <a:ext cx="1051560" cy="347472"/>
+          </a:xfrm>
+          <a:prstGeom prst="rect">
+            <a:avLst/>
+          </a:prstGeom>
+          <a:noFill/>
+        </p:spPr>
+        <p:txBody>
+          <a:bodyPr wrap="square" anchor="t" lIns="0" rIns="0" tIns="0" bIns="0">
+            <a:spAutoFit/>
+          </a:bodyPr>
+          <a:lstStyle/>
+          <a:p>
+            <a:pPr algn="r">
+              <a:lnSpc>
+                <a:spcPct val="115000"/>
+              </a:lnSpc>
+              <a:spcAft>
+                <a:spcPts val="400"/>
+              </a:spcAft>
+            </a:pPr>
+            <a:r>
+              <a:rPr sz="1200" b="0">
+                <a:solidFill>
+                  <a:srgbClr val="8FA3C0"/>
+                </a:solidFill>
+                <a:latin typeface="Segoe UI"/>
+              </a:rPr>
+              <a:t>0.137</a:t>
+            </a:r>
+          </a:p>
+        </p:txBody>
+      </p:sp>
+      <p:sp>
+        <p:nvSpPr>
+          <p:cNvPr id="32" name="TextBox 31"/>
+          <p:cNvSpPr txBox="1"/>
+          <p:nvPr/>
+        </p:nvSpPr>
+        <p:spPr>
+          <a:xfrm>
+            <a:off x="6400800" y="3721608"/>
+            <a:ext cx="2103120" cy="347472"/>
+          </a:xfrm>
+          <a:prstGeom prst="rect">
+            <a:avLst/>
+          </a:prstGeom>
+          <a:noFill/>
+        </p:spPr>
+        <p:txBody>
+          <a:bodyPr wrap="square" anchor="t" lIns="0" rIns="0" tIns="0" bIns="0">
+            <a:spAutoFit/>
+          </a:bodyPr>
+          <a:lstStyle/>
+          <a:p>
+            <a:pPr algn="l">
+              <a:lnSpc>
+                <a:spcPct val="115000"/>
+              </a:lnSpc>
+              <a:spcAft>
+                <a:spcPts val="400"/>
+              </a:spcAft>
+            </a:pPr>
+            <a:r>
+              <a:rPr sz="1200" b="0">
+                <a:solidFill>
+                  <a:srgbClr val="E6EDF7"/>
+                </a:solidFill>
+                <a:latin typeface="Segoe UI"/>
+              </a:rPr>
+              <a:t>Every column</a:t>
+            </a:r>
+          </a:p>
+        </p:txBody>
+      </p:sp>
+      <p:sp>
+        <p:nvSpPr>
+          <p:cNvPr id="33" name="TextBox 32"/>
+          <p:cNvSpPr txBox="1"/>
+          <p:nvPr/>
+        </p:nvSpPr>
+        <p:spPr>
+          <a:xfrm>
+            <a:off x="8503920" y="3721608"/>
+            <a:ext cx="914400" cy="347472"/>
+          </a:xfrm>
+          <a:prstGeom prst="rect">
+            <a:avLst/>
+          </a:prstGeom>
+          <a:noFill/>
+        </p:spPr>
+        <p:txBody>
+          <a:bodyPr wrap="square" anchor="t" lIns="0" rIns="0" tIns="0" bIns="0">
+            <a:spAutoFit/>
+          </a:bodyPr>
+          <a:lstStyle/>
+          <a:p>
+            <a:pPr algn="r">
+              <a:lnSpc>
+                <a:spcPct val="115000"/>
+              </a:lnSpc>
+              <a:spcAft>
+                <a:spcPts val="400"/>
+              </a:spcAft>
+            </a:pPr>
+            <a:r>
+              <a:rPr sz="1200" b="0">
+                <a:solidFill>
+                  <a:srgbClr val="8FA3C0"/>
+                </a:solidFill>
+                <a:latin typeface="Segoe UI"/>
+              </a:rPr>
+              <a:t>5,926</a:t>
+            </a:r>
+          </a:p>
+        </p:txBody>
+      </p:sp>
+      <p:sp>
+        <p:nvSpPr>
+          <p:cNvPr id="34" name="TextBox 33"/>
+          <p:cNvSpPr txBox="1"/>
+          <p:nvPr/>
+        </p:nvSpPr>
+        <p:spPr>
+          <a:xfrm>
+            <a:off x="9418320" y="3721608"/>
+            <a:ext cx="1051560" cy="347472"/>
+          </a:xfrm>
+          <a:prstGeom prst="rect">
+            <a:avLst/>
+          </a:prstGeom>
+          <a:noFill/>
+        </p:spPr>
+        <p:txBody>
+          <a:bodyPr wrap="square" anchor="t" lIns="0" rIns="0" tIns="0" bIns="0">
+            <a:spAutoFit/>
+          </a:bodyPr>
+          <a:lstStyle/>
+          <a:p>
+            <a:pPr algn="r">
+              <a:lnSpc>
+                <a:spcPct val="115000"/>
+              </a:lnSpc>
+              <a:spcAft>
+                <a:spcPts val="400"/>
+              </a:spcAft>
+            </a:pPr>
+            <a:r>
+              <a:rPr sz="1200" b="0">
+                <a:solidFill>
+                  <a:srgbClr val="8FA3C0"/>
+                </a:solidFill>
+                <a:latin typeface="Segoe UI"/>
+              </a:rPr>
+              <a:t>0.618</a:t>
+            </a:r>
+          </a:p>
+        </p:txBody>
+      </p:sp>
+      <p:sp>
+        <p:nvSpPr>
+          <p:cNvPr id="35" name="TextBox 34"/>
+          <p:cNvSpPr txBox="1"/>
+          <p:nvPr/>
+        </p:nvSpPr>
+        <p:spPr>
+          <a:xfrm>
+            <a:off x="10469880" y="3721608"/>
+            <a:ext cx="1051560" cy="347472"/>
+          </a:xfrm>
+          <a:prstGeom prst="rect">
+            <a:avLst/>
+          </a:prstGeom>
+          <a:noFill/>
+        </p:spPr>
+        <p:txBody>
+          <a:bodyPr wrap="square" anchor="t" lIns="0" rIns="0" tIns="0" bIns="0">
+            <a:spAutoFit/>
+          </a:bodyPr>
+          <a:lstStyle/>
+          <a:p>
+            <a:pPr algn="r">
+              <a:lnSpc>
+                <a:spcPct val="115000"/>
+              </a:lnSpc>
+              <a:spcAft>
+                <a:spcPts val="400"/>
+              </a:spcAft>
+            </a:pPr>
+            <a:r>
+              <a:rPr sz="1200" b="0">
+                <a:solidFill>
+                  <a:srgbClr val="8FA3C0"/>
+                </a:solidFill>
+                <a:latin typeface="Segoe UI"/>
+              </a:rPr>
+              <a:t>0.112</a:t>
+            </a:r>
+          </a:p>
+        </p:txBody>
+      </p:sp>
+      <p:sp>
+        <p:nvSpPr>
+          <p:cNvPr id="36" name="TextBox 35"/>
+          <p:cNvSpPr txBox="1"/>
+          <p:nvPr/>
+        </p:nvSpPr>
+        <p:spPr>
+          <a:xfrm>
+            <a:off x="6400800" y="4087368"/>
+            <a:ext cx="5120640" cy="365760"/>
+          </a:xfrm>
+          <a:prstGeom prst="rect">
+            <a:avLst/>
+          </a:prstGeom>
+          <a:noFill/>
+        </p:spPr>
+        <p:txBody>
+          <a:bodyPr wrap="square" anchor="t" lIns="0" rIns="0" tIns="0" bIns="0">
+            <a:spAutoFit/>
+          </a:bodyPr>
+          <a:lstStyle/>
+          <a:p>
+            <a:pPr algn="l">
+              <a:lnSpc>
+                <a:spcPct val="120000"/>
+              </a:lnSpc>
+              <a:spcAft>
+                <a:spcPts val="400"/>
+              </a:spcAft>
+            </a:pPr>
+            <a:r>
+              <a:rPr sz="1150" b="0">
+                <a:solidFill>
+                  <a:srgbClr val="8FA3C0"/>
+                </a:solidFill>
+                <a:latin typeface="Segoe UI"/>
+              </a:rPr>
+              <a:t>The bank's eighteen beat all 5,926 columns. With 186 positives against thousands of predictors, that is what theory predicts.</a:t>
+            </a:r>
+          </a:p>
+        </p:txBody>
+      </p:sp>
+      <p:sp>
+        <p:nvSpPr>
+          <p:cNvPr id="37" name="Rounded Rectangle 36"/>
+          <p:cNvSpPr/>
+          <p:nvPr/>
+        </p:nvSpPr>
+        <p:spPr>
+          <a:xfrm>
+            <a:off x="640080" y="4480560"/>
+            <a:ext cx="2651760" cy="868680"/>
+          </a:xfrm>
+          <a:prstGeom prst="roundRect">
+            <a:avLst>
+              <a:gd name="adj" fmla="val 4000"/>
+            </a:avLst>
+          </a:prstGeom>
+          <a:solidFill>
+            <a:srgbClr val="182031"/>
+          </a:solidFill>
+          <a:ln w="9525">
+            <a:solidFill>
+              <a:srgbClr val="23304A"/>
+            </a:solidFill>
+          </a:ln>
+          <a:effectLst/>
+        </p:spPr>
+        <p:style>
+          <a:lnRef idx="1">
+            <a:schemeClr val="accent1"/>
+          </a:lnRef>
+          <a:fillRef idx="3">
+            <a:schemeClr val="accent1"/>
+          </a:fillRef>
+          <a:effectRef idx="2">
+            <a:schemeClr val="accent1"/>
+          </a:effectRef>
+          <a:fontRef idx="minor">
+            <a:schemeClr val="lt1"/>
+          </a:fontRef>
+        </p:style>
+        <p:txBody>
+          <a:bodyPr rtlCol="0" anchor="ctr"/>
+          <a:lstStyle/>
+          <a:p>
+            <a:pPr algn="ctr"/>
+          </a:p>
+        </p:txBody>
+      </p:sp>
+      <p:sp>
+        <p:nvSpPr>
+          <p:cNvPr id="38" name="TextBox 37"/>
+          <p:cNvSpPr txBox="1"/>
+          <p:nvPr/>
+        </p:nvSpPr>
+        <p:spPr>
+          <a:xfrm>
+            <a:off x="768096" y="4608576"/>
+            <a:ext cx="2395728" cy="457200"/>
+          </a:xfrm>
+          <a:prstGeom prst="rect">
+            <a:avLst/>
+          </a:prstGeom>
+          <a:noFill/>
+        </p:spPr>
+        <p:txBody>
+          <a:bodyPr wrap="square" anchor="t" lIns="0" rIns="0" tIns="0" bIns="0">
+            <a:spAutoFit/>
+          </a:bodyPr>
+          <a:lstStyle/>
+          <a:p>
+            <a:pPr algn="ctr">
+              <a:lnSpc>
+                <a:spcPct val="115000"/>
+              </a:lnSpc>
+              <a:spcAft>
+                <a:spcPts val="400"/>
+              </a:spcAft>
+            </a:pPr>
+            <a:r>
+              <a:rPr sz="2200" b="1">
+                <a:solidFill>
+                  <a:srgbClr val="2ECC9B"/>
+                </a:solidFill>
+                <a:latin typeface="Segoe UI"/>
+              </a:rPr>
+              <a:t>0.7046</a:t>
+            </a:r>
+          </a:p>
+        </p:txBody>
+      </p:sp>
+      <p:sp>
+        <p:nvSpPr>
+          <p:cNvPr id="39" name="TextBox 38"/>
+          <p:cNvSpPr txBox="1"/>
+          <p:nvPr/>
+        </p:nvSpPr>
+        <p:spPr>
+          <a:xfrm>
+            <a:off x="731520" y="4983480"/>
+            <a:ext cx="2468880" cy="274320"/>
+          </a:xfrm>
+          <a:prstGeom prst="rect">
+            <a:avLst/>
+          </a:prstGeom>
+          <a:noFill/>
+        </p:spPr>
+        <p:txBody>
+          <a:bodyPr wrap="square" anchor="t" lIns="0" rIns="0" tIns="0" bIns="0">
+            <a:spAutoFit/>
+          </a:bodyPr>
+          <a:lstStyle/>
+          <a:p>
+            <a:pPr algn="ctr">
+              <a:lnSpc>
+                <a:spcPct val="100000"/>
+              </a:lnSpc>
+              <a:spcAft>
+                <a:spcPts val="400"/>
+              </a:spcAft>
+            </a:pPr>
+            <a:r>
+              <a:rPr sz="900" b="0">
+                <a:solidFill>
+                  <a:srgbClr val="61708A"/>
+                </a:solidFill>
+                <a:latin typeface="Segoe UI"/>
+              </a:rPr>
+              <a:t>UNTOUCHED HOLDOUT ROC-AUC</a:t>
+            </a:r>
+          </a:p>
+        </p:txBody>
+      </p:sp>
+      <p:sp>
+        <p:nvSpPr>
+          <p:cNvPr id="40" name="Rounded Rectangle 39"/>
+          <p:cNvSpPr/>
+          <p:nvPr/>
+        </p:nvSpPr>
+        <p:spPr>
+          <a:xfrm>
+            <a:off x="3429000" y="4480560"/>
+            <a:ext cx="2651760" cy="868680"/>
+          </a:xfrm>
+          <a:prstGeom prst="roundRect">
+            <a:avLst>
+              <a:gd name="adj" fmla="val 4000"/>
+            </a:avLst>
+          </a:prstGeom>
+          <a:solidFill>
+            <a:srgbClr val="182031"/>
+          </a:solidFill>
+          <a:ln w="9525">
+            <a:solidFill>
+              <a:srgbClr val="23304A"/>
+            </a:solidFill>
+          </a:ln>
+          <a:effectLst/>
+        </p:spPr>
+        <p:style>
+          <a:lnRef idx="1">
+            <a:schemeClr val="accent1"/>
+          </a:lnRef>
+          <a:fillRef idx="3">
+            <a:schemeClr val="accent1"/>
+          </a:fillRef>
+          <a:effectRef idx="2">
+            <a:schemeClr val="accent1"/>
+          </a:effectRef>
+          <a:fontRef idx="minor">
+            <a:schemeClr val="lt1"/>
+          </a:fontRef>
+        </p:style>
+        <p:txBody>
+          <a:bodyPr rtlCol="0" anchor="ctr"/>
+          <a:lstStyle/>
+          <a:p>
+            <a:pPr algn="ctr"/>
+          </a:p>
+        </p:txBody>
+      </p:sp>
+      <p:sp>
+        <p:nvSpPr>
+          <p:cNvPr id="41" name="TextBox 40"/>
+          <p:cNvSpPr txBox="1"/>
+          <p:nvPr/>
+        </p:nvSpPr>
+        <p:spPr>
+          <a:xfrm>
+            <a:off x="3557016" y="4608576"/>
+            <a:ext cx="2395728" cy="457200"/>
+          </a:xfrm>
+          <a:prstGeom prst="rect">
+            <a:avLst/>
+          </a:prstGeom>
+          <a:noFill/>
+        </p:spPr>
+        <p:txBody>
+          <a:bodyPr wrap="square" anchor="t" lIns="0" rIns="0" tIns="0" bIns="0">
+            <a:spAutoFit/>
+          </a:bodyPr>
+          <a:lstStyle/>
+          <a:p>
+            <a:pPr algn="ctr">
+              <a:lnSpc>
+                <a:spcPct val="115000"/>
+              </a:lnSpc>
+              <a:spcAft>
+                <a:spcPts val="400"/>
+              </a:spcAft>
+            </a:pPr>
+            <a:r>
+              <a:rPr sz="2200" b="1">
+                <a:solidFill>
+                  <a:srgbClr val="4DA3FF"/>
+                </a:solidFill>
+                <a:latin typeface="Segoe UI"/>
+              </a:rPr>
+              <a:t>0.7116</a:t>
+            </a:r>
+          </a:p>
+        </p:txBody>
+      </p:sp>
+      <p:sp>
+        <p:nvSpPr>
+          <p:cNvPr id="42" name="TextBox 41"/>
+          <p:cNvSpPr txBox="1"/>
+          <p:nvPr/>
+        </p:nvSpPr>
+        <p:spPr>
+          <a:xfrm>
+            <a:off x="3520440" y="4983480"/>
+            <a:ext cx="2468880" cy="274320"/>
+          </a:xfrm>
+          <a:prstGeom prst="rect">
+            <a:avLst/>
+          </a:prstGeom>
+          <a:noFill/>
+        </p:spPr>
+        <p:txBody>
+          <a:bodyPr wrap="square" anchor="t" lIns="0" rIns="0" tIns="0" bIns="0">
+            <a:spAutoFit/>
+          </a:bodyPr>
+          <a:lstStyle/>
+          <a:p>
+            <a:pPr algn="ctr">
+              <a:lnSpc>
+                <a:spcPct val="100000"/>
+              </a:lnSpc>
+              <a:spcAft>
+                <a:spcPts val="400"/>
+              </a:spcAft>
+            </a:pPr>
+            <a:r>
+              <a:rPr sz="900" b="0">
+                <a:solidFill>
+                  <a:srgbClr val="61708A"/>
+                </a:solidFill>
+                <a:latin typeface="Segoe UI"/>
+              </a:rPr>
+              <a:t>CROSS-VALIDATED ESTIMATE</a:t>
+            </a:r>
+          </a:p>
+        </p:txBody>
+      </p:sp>
+      <p:sp>
+        <p:nvSpPr>
+          <p:cNvPr id="43" name="Rounded Rectangle 42"/>
+          <p:cNvSpPr/>
+          <p:nvPr/>
+        </p:nvSpPr>
+        <p:spPr>
+          <a:xfrm>
+            <a:off x="6217920" y="4480560"/>
+            <a:ext cx="2651760" cy="868680"/>
+          </a:xfrm>
+          <a:prstGeom prst="roundRect">
+            <a:avLst>
+              <a:gd name="adj" fmla="val 4000"/>
+            </a:avLst>
+          </a:prstGeom>
+          <a:solidFill>
+            <a:srgbClr val="182031"/>
+          </a:solidFill>
+          <a:ln w="9525">
+            <a:solidFill>
+              <a:srgbClr val="23304A"/>
+            </a:solidFill>
+          </a:ln>
+          <a:effectLst/>
+        </p:spPr>
+        <p:style>
+          <a:lnRef idx="1">
+            <a:schemeClr val="accent1"/>
+          </a:lnRef>
+          <a:fillRef idx="3">
+            <a:schemeClr val="accent1"/>
+          </a:fillRef>
+          <a:effectRef idx="2">
+            <a:schemeClr val="accent1"/>
+          </a:effectRef>
+          <a:fontRef idx="minor">
+            <a:schemeClr val="lt1"/>
+          </a:fontRef>
+        </p:style>
+        <p:txBody>
+          <a:bodyPr rtlCol="0" anchor="ctr"/>
+          <a:lstStyle/>
+          <a:p>
+            <a:pPr algn="ctr"/>
+          </a:p>
+        </p:txBody>
+      </p:sp>
+      <p:sp>
+        <p:nvSpPr>
+          <p:cNvPr id="44" name="TextBox 43"/>
+          <p:cNvSpPr txBox="1"/>
+          <p:nvPr/>
+        </p:nvSpPr>
+        <p:spPr>
+          <a:xfrm>
+            <a:off x="6345936" y="4608576"/>
+            <a:ext cx="2395728" cy="457200"/>
+          </a:xfrm>
+          <a:prstGeom prst="rect">
+            <a:avLst/>
+          </a:prstGeom>
+          <a:noFill/>
+        </p:spPr>
+        <p:txBody>
+          <a:bodyPr wrap="square" anchor="t" lIns="0" rIns="0" tIns="0" bIns="0">
+            <a:spAutoFit/>
+          </a:bodyPr>
+          <a:lstStyle/>
+          <a:p>
+            <a:pPr algn="ctr">
+              <a:lnSpc>
+                <a:spcPct val="115000"/>
+              </a:lnSpc>
+              <a:spcAft>
+                <a:spcPts val="400"/>
+              </a:spcAft>
+            </a:pPr>
+            <a:r>
+              <a:rPr sz="2200" b="1">
+                <a:solidFill>
+                  <a:srgbClr val="FF4D5E"/>
+                </a:solidFill>
+                <a:latin typeface="Segoe UI"/>
+              </a:rPr>
+              <a:t>5.5×</a:t>
+            </a:r>
+          </a:p>
+        </p:txBody>
+      </p:sp>
+      <p:sp>
+        <p:nvSpPr>
+          <p:cNvPr id="45" name="TextBox 44"/>
+          <p:cNvSpPr txBox="1"/>
+          <p:nvPr/>
+        </p:nvSpPr>
+        <p:spPr>
+          <a:xfrm>
+            <a:off x="6309360" y="4983480"/>
+            <a:ext cx="2468880" cy="274320"/>
+          </a:xfrm>
+          <a:prstGeom prst="rect">
+            <a:avLst/>
+          </a:prstGeom>
+          <a:noFill/>
+        </p:spPr>
+        <p:txBody>
+          <a:bodyPr wrap="square" anchor="t" lIns="0" rIns="0" tIns="0" bIns="0">
+            <a:spAutoFit/>
+          </a:bodyPr>
+          <a:lstStyle/>
+          <a:p>
+            <a:pPr algn="ctr">
+              <a:lnSpc>
+                <a:spcPct val="100000"/>
+              </a:lnSpc>
+              <a:spcAft>
+                <a:spcPts val="400"/>
+              </a:spcAft>
+            </a:pPr>
+            <a:r>
+              <a:rPr sz="900" b="0">
+                <a:solidFill>
+                  <a:srgbClr val="61708A"/>
+                </a:solidFill>
+                <a:latin typeface="Segoe UI"/>
+              </a:rPr>
+              <a:t>PR-AUC INFLATION IF LEAKED</a:t>
+            </a:r>
+          </a:p>
+        </p:txBody>
+      </p:sp>
+      <p:sp>
+        <p:nvSpPr>
+          <p:cNvPr id="46" name="Rounded Rectangle 45"/>
+          <p:cNvSpPr/>
+          <p:nvPr/>
+        </p:nvSpPr>
+        <p:spPr>
+          <a:xfrm>
+            <a:off x="9006840" y="4480560"/>
+            <a:ext cx="2651760" cy="868680"/>
+          </a:xfrm>
+          <a:prstGeom prst="roundRect">
+            <a:avLst>
+              <a:gd name="adj" fmla="val 4000"/>
+            </a:avLst>
+          </a:prstGeom>
+          <a:solidFill>
+            <a:srgbClr val="182031"/>
+          </a:solidFill>
+          <a:ln w="9525">
+            <a:solidFill>
+              <a:srgbClr val="23304A"/>
+            </a:solidFill>
+          </a:ln>
+          <a:effectLst/>
+        </p:spPr>
+        <p:style>
+          <a:lnRef idx="1">
+            <a:schemeClr val="accent1"/>
+          </a:lnRef>
+          <a:fillRef idx="3">
+            <a:schemeClr val="accent1"/>
+          </a:fillRef>
+          <a:effectRef idx="2">
+            <a:schemeClr val="accent1"/>
+          </a:effectRef>
+          <a:fontRef idx="minor">
+            <a:schemeClr val="lt1"/>
+          </a:fontRef>
+        </p:style>
+        <p:txBody>
+          <a:bodyPr rtlCol="0" anchor="ctr"/>
+          <a:lstStyle/>
+          <a:p>
+            <a:pPr algn="ctr"/>
+          </a:p>
+        </p:txBody>
+      </p:sp>
+      <p:sp>
+        <p:nvSpPr>
+          <p:cNvPr id="47" name="TextBox 46"/>
+          <p:cNvSpPr txBox="1"/>
+          <p:nvPr/>
+        </p:nvSpPr>
+        <p:spPr>
+          <a:xfrm>
+            <a:off x="9134856" y="4608576"/>
+            <a:ext cx="2395728" cy="457200"/>
+          </a:xfrm>
+          <a:prstGeom prst="rect">
+            <a:avLst/>
+          </a:prstGeom>
+          <a:noFill/>
+        </p:spPr>
+        <p:txBody>
+          <a:bodyPr wrap="square" anchor="t" lIns="0" rIns="0" tIns="0" bIns="0">
+            <a:spAutoFit/>
+          </a:bodyPr>
+          <a:lstStyle/>
+          <a:p>
+            <a:pPr algn="ctr">
+              <a:lnSpc>
+                <a:spcPct val="115000"/>
+              </a:lnSpc>
+              <a:spcAft>
+                <a:spcPts val="400"/>
+              </a:spcAft>
+            </a:pPr>
+            <a:r>
+              <a:rPr sz="2200" b="1">
+                <a:solidFill>
+                  <a:srgbClr val="7D5CFF"/>
+                </a:solidFill>
+                <a:latin typeface="Segoe UI"/>
+              </a:rPr>
+              <a:t>3,924</a:t>
+            </a:r>
+          </a:p>
+        </p:txBody>
+      </p:sp>
+      <p:sp>
+        <p:nvSpPr>
+          <p:cNvPr id="48" name="TextBox 47"/>
+          <p:cNvSpPr txBox="1"/>
+          <p:nvPr/>
+        </p:nvSpPr>
+        <p:spPr>
+          <a:xfrm>
+            <a:off x="9098280" y="4983480"/>
+            <a:ext cx="2468880" cy="274320"/>
+          </a:xfrm>
+          <a:prstGeom prst="rect">
+            <a:avLst/>
+          </a:prstGeom>
+          <a:noFill/>
+        </p:spPr>
+        <p:txBody>
+          <a:bodyPr wrap="square" anchor="t" lIns="0" rIns="0" tIns="0" bIns="0">
+            <a:spAutoFit/>
+          </a:bodyPr>
+          <a:lstStyle/>
+          <a:p>
+            <a:pPr algn="ctr">
+              <a:lnSpc>
+                <a:spcPct val="100000"/>
+              </a:lnSpc>
+              <a:spcAft>
+                <a:spcPts val="400"/>
+              </a:spcAft>
+            </a:pPr>
+            <a:r>
+              <a:rPr sz="900" b="0">
+                <a:solidFill>
+                  <a:srgbClr val="61708A"/>
+                </a:solidFill>
+                <a:latin typeface="Segoe UI"/>
+              </a:rPr>
+              <a:t>COLUMNS PARSED BY GRAMMAR</a:t>
+            </a:r>
+          </a:p>
+        </p:txBody>
+      </p:sp>
+      <p:sp>
+        <p:nvSpPr>
+          <p:cNvPr id="49" name="Rounded Rectangle 48"/>
+          <p:cNvSpPr/>
+          <p:nvPr/>
+        </p:nvSpPr>
+        <p:spPr>
+          <a:xfrm>
+            <a:off x="640080" y="5486400"/>
+            <a:ext cx="10881360" cy="777240"/>
+          </a:xfrm>
+          <a:prstGeom prst="roundRect">
+            <a:avLst>
+              <a:gd name="adj" fmla="val 4000"/>
+            </a:avLst>
+          </a:prstGeom>
+          <a:solidFill>
+            <a:srgbClr val="2A1A0F"/>
+          </a:solidFill>
+          <a:ln w="9525">
+            <a:solidFill>
+              <a:srgbClr val="FF8C42"/>
+            </a:solidFill>
+          </a:ln>
+          <a:effectLst/>
+        </p:spPr>
+        <p:style>
+          <a:lnRef idx="1">
+            <a:schemeClr val="accent1"/>
+          </a:lnRef>
+          <a:fillRef idx="3">
+            <a:schemeClr val="accent1"/>
+          </a:fillRef>
+          <a:effectRef idx="2">
+            <a:schemeClr val="accent1"/>
+          </a:effectRef>
+          <a:fontRef idx="minor">
+            <a:schemeClr val="lt1"/>
+          </a:fontRef>
+        </p:style>
+        <p:txBody>
+          <a:bodyPr rtlCol="0" anchor="ctr"/>
+          <a:lstStyle/>
+          <a:p>
+            <a:pPr algn="ctr"/>
+          </a:p>
+        </p:txBody>
+      </p:sp>
+      <p:sp>
+        <p:nvSpPr>
+          <p:cNvPr id="50" name="TextBox 49"/>
+          <p:cNvSpPr txBox="1"/>
+          <p:nvPr/>
+        </p:nvSpPr>
+        <p:spPr>
+          <a:xfrm>
+            <a:off x="914400" y="5632704"/>
+            <a:ext cx="10332720" cy="502920"/>
+          </a:xfrm>
+          <a:prstGeom prst="rect">
+            <a:avLst/>
+          </a:prstGeom>
+          <a:noFill/>
+        </p:spPr>
+        <p:txBody>
+          <a:bodyPr wrap="square" anchor="t" lIns="0" rIns="0" tIns="0" bIns="0">
+            <a:spAutoFit/>
+          </a:bodyPr>
+          <a:lstStyle/>
+          <a:p>
+            <a:pPr algn="l">
+              <a:lnSpc>
+                <a:spcPct val="120000"/>
+              </a:lnSpc>
+              <a:spcAft>
+                <a:spcPts val="400"/>
+              </a:spcAft>
+            </a:pPr>
+            <a:r>
+              <a:rPr sz="1300" b="1">
+                <a:solidFill>
+                  <a:srgbClr val="E6EDF7"/>
+                </a:solidFill>
+                <a:latin typeface="Segoe UI"/>
+              </a:rPr>
+              <a:t>Measured on a stand-in table with their exact schema — their data was not released when this was built. It proves the pipeline runs and does not flatter itself. It is not model performance, and we will not present it as such.</a:t>
+            </a:r>
+          </a:p>
+        </p:txBody>
+      </p:sp>
+      <p:sp>
+        <p:nvSpPr>
+          <p:cNvPr id="51" name="TextBox 50"/>
           <p:cNvSpPr txBox="1"/>
           <p:nvPr/>
         </p:nvSpPr>
@@ -11718,7 +13143,7 @@
       </p:sp>
       <p:sp>
         <p:nvSpPr>
-          <p:cNvPr id="19" name="TextBox 18"/>
+          <p:cNvPr id="52" name="TextBox 51"/>
           <p:cNvSpPr txBox="1"/>
           <p:nvPr/>
         </p:nvSpPr>
@@ -11753,7 +13178,7 @@
                 </a:solidFill>
                 <a:latin typeface="Segoe UI"/>
               </a:rPr>
-              <a:t>17 / 18</a:t>
+              <a:t>17 / 19</a:t>
             </a:r>
           </a:p>
         </p:txBody>
@@ -11822,6 +13247,784 @@
       </p:sp>
       <p:sp>
         <p:nvSpPr>
+          <p:cNvPr id="3" name="TextBox 2"/>
+          <p:cNvSpPr txBox="1"/>
+          <p:nvPr/>
+        </p:nvSpPr>
+        <p:spPr>
+          <a:xfrm>
+            <a:off x="640080" y="384048"/>
+            <a:ext cx="10972800" cy="274320"/>
+          </a:xfrm>
+          <a:prstGeom prst="rect">
+            <a:avLst/>
+          </a:prstGeom>
+          <a:noFill/>
+        </p:spPr>
+        <p:txBody>
+          <a:bodyPr wrap="square" anchor="t" lIns="0" rIns="0" tIns="0" bIns="0">
+            <a:spAutoFit/>
+          </a:bodyPr>
+          <a:lstStyle/>
+          <a:p>
+            <a:pPr algn="l">
+              <a:lnSpc>
+                <a:spcPct val="115000"/>
+              </a:lnSpc>
+              <a:spcAft>
+                <a:spcPts val="400"/>
+              </a:spcAft>
+            </a:pPr>
+            <a:r>
+              <a:rPr sz="1100" b="1">
+                <a:solidFill>
+                  <a:srgbClr val="4DA3FF"/>
+                </a:solidFill>
+                <a:latin typeface="Segoe UI"/>
+              </a:rPr>
+              <a:t>LIMITATIONS</a:t>
+            </a:r>
+          </a:p>
+        </p:txBody>
+      </p:sp>
+      <p:sp>
+        <p:nvSpPr>
+          <p:cNvPr id="4" name="TextBox 3"/>
+          <p:cNvSpPr txBox="1"/>
+          <p:nvPr/>
+        </p:nvSpPr>
+        <p:spPr>
+          <a:xfrm>
+            <a:off x="640080" y="658368"/>
+            <a:ext cx="10972800" cy="594360"/>
+          </a:xfrm>
+          <a:prstGeom prst="rect">
+            <a:avLst/>
+          </a:prstGeom>
+          <a:noFill/>
+        </p:spPr>
+        <p:txBody>
+          <a:bodyPr wrap="square" anchor="t" lIns="0" rIns="0" tIns="0" bIns="0">
+            <a:spAutoFit/>
+          </a:bodyPr>
+          <a:lstStyle/>
+          <a:p>
+            <a:pPr algn="l">
+              <a:lnSpc>
+                <a:spcPct val="115000"/>
+              </a:lnSpc>
+              <a:spcAft>
+                <a:spcPts val="400"/>
+              </a:spcAft>
+            </a:pPr>
+            <a:r>
+              <a:rPr sz="3000" b="1">
+                <a:solidFill>
+                  <a:srgbClr val="E6EDF7"/>
+                </a:solidFill>
+                <a:latin typeface="Segoe UI"/>
+              </a:rPr>
+              <a:t>Stated plainly, because hiding them helps nobody</a:t>
+            </a:r>
+          </a:p>
+        </p:txBody>
+      </p:sp>
+      <p:sp>
+        <p:nvSpPr>
+          <p:cNvPr id="5" name="Rectangle 4"/>
+          <p:cNvSpPr/>
+          <p:nvPr/>
+        </p:nvSpPr>
+        <p:spPr>
+          <a:xfrm>
+            <a:off x="640080" y="1207008"/>
+            <a:ext cx="1005840" cy="31750"/>
+          </a:xfrm>
+          <a:prstGeom prst="rect">
+            <a:avLst/>
+          </a:prstGeom>
+          <a:solidFill>
+            <a:srgbClr val="4DA3FF"/>
+          </a:solidFill>
+          <a:ln>
+            <a:noFill/>
+          </a:ln>
+          <a:effectLst/>
+        </p:spPr>
+        <p:style>
+          <a:lnRef idx="1">
+            <a:schemeClr val="accent1"/>
+          </a:lnRef>
+          <a:fillRef idx="3">
+            <a:schemeClr val="accent1"/>
+          </a:fillRef>
+          <a:effectRef idx="2">
+            <a:schemeClr val="accent1"/>
+          </a:effectRef>
+          <a:fontRef idx="minor">
+            <a:schemeClr val="lt1"/>
+          </a:fontRef>
+        </p:style>
+        <p:txBody>
+          <a:bodyPr rtlCol="0" anchor="ctr"/>
+          <a:lstStyle/>
+          <a:p>
+            <a:pPr algn="ctr"/>
+          </a:p>
+        </p:txBody>
+      </p:sp>
+      <p:sp>
+        <p:nvSpPr>
+          <p:cNvPr id="6" name="TextBox 5"/>
+          <p:cNvSpPr txBox="1"/>
+          <p:nvPr/>
+        </p:nvSpPr>
+        <p:spPr>
+          <a:xfrm>
+            <a:off x="640080" y="1389888"/>
+            <a:ext cx="3108960" cy="320040"/>
+          </a:xfrm>
+          <a:prstGeom prst="rect">
+            <a:avLst/>
+          </a:prstGeom>
+          <a:noFill/>
+        </p:spPr>
+        <p:txBody>
+          <a:bodyPr wrap="square" anchor="t" lIns="0" rIns="0" tIns="0" bIns="0">
+            <a:spAutoFit/>
+          </a:bodyPr>
+          <a:lstStyle/>
+          <a:p>
+            <a:pPr algn="l">
+              <a:lnSpc>
+                <a:spcPct val="115000"/>
+              </a:lnSpc>
+              <a:spcAft>
+                <a:spcPts val="400"/>
+              </a:spcAft>
+            </a:pPr>
+            <a:r>
+              <a:rPr sz="1350" b="1">
+                <a:solidFill>
+                  <a:srgbClr val="FF8C42"/>
+                </a:solidFill>
+                <a:latin typeface="Segoe UI"/>
+              </a:rPr>
+              <a:t>Simulated data</a:t>
+            </a:r>
+          </a:p>
+        </p:txBody>
+      </p:sp>
+      <p:sp>
+        <p:nvSpPr>
+          <p:cNvPr id="7" name="TextBox 6"/>
+          <p:cNvSpPr txBox="1"/>
+          <p:nvPr/>
+        </p:nvSpPr>
+        <p:spPr>
+          <a:xfrm>
+            <a:off x="3931920" y="1389888"/>
+            <a:ext cx="7589520" cy="548640"/>
+          </a:xfrm>
+          <a:prstGeom prst="rect">
+            <a:avLst/>
+          </a:prstGeom>
+          <a:noFill/>
+        </p:spPr>
+        <p:txBody>
+          <a:bodyPr wrap="square" anchor="t" lIns="0" rIns="0" tIns="0" bIns="0">
+            <a:spAutoFit/>
+          </a:bodyPr>
+          <a:lstStyle/>
+          <a:p>
+            <a:pPr algn="l">
+              <a:lnSpc>
+                <a:spcPct val="125000"/>
+              </a:lnSpc>
+              <a:spcAft>
+                <a:spcPts val="400"/>
+              </a:spcAft>
+            </a:pPr>
+            <a:r>
+              <a:rPr sz="1250" b="0">
+                <a:solidFill>
+                  <a:srgbClr val="8FA3C0"/>
+                </a:solidFill>
+                <a:latin typeface="Segoe UI"/>
+              </a:rPr>
+              <a:t>Demonstrates the architecture beats a rule engine on data with realistic decoys. Not a forecast of production performance.</a:t>
+            </a:r>
+          </a:p>
+        </p:txBody>
+      </p:sp>
+      <p:sp>
+        <p:nvSpPr>
+          <p:cNvPr id="8" name="TextBox 7"/>
+          <p:cNvSpPr txBox="1"/>
+          <p:nvPr/>
+        </p:nvSpPr>
+        <p:spPr>
+          <a:xfrm>
+            <a:off x="640080" y="2103120"/>
+            <a:ext cx="3108960" cy="320040"/>
+          </a:xfrm>
+          <a:prstGeom prst="rect">
+            <a:avLst/>
+          </a:prstGeom>
+          <a:noFill/>
+        </p:spPr>
+        <p:txBody>
+          <a:bodyPr wrap="square" anchor="t" lIns="0" rIns="0" tIns="0" bIns="0">
+            <a:spAutoFit/>
+          </a:bodyPr>
+          <a:lstStyle/>
+          <a:p>
+            <a:pPr algn="l">
+              <a:lnSpc>
+                <a:spcPct val="115000"/>
+              </a:lnSpc>
+              <a:spcAft>
+                <a:spcPts val="400"/>
+              </a:spcAft>
+            </a:pPr>
+            <a:r>
+              <a:rPr sz="1350" b="1">
+                <a:solidFill>
+                  <a:srgbClr val="FF8C42"/>
+                </a:solidFill>
+                <a:latin typeface="Segoe UI"/>
+              </a:rPr>
+              <a:t>Static APK analysis only</a:t>
+            </a:r>
+          </a:p>
+        </p:txBody>
+      </p:sp>
+      <p:sp>
+        <p:nvSpPr>
+          <p:cNvPr id="9" name="TextBox 8"/>
+          <p:cNvSpPr txBox="1"/>
+          <p:nvPr/>
+        </p:nvSpPr>
+        <p:spPr>
+          <a:xfrm>
+            <a:off x="3931920" y="2103120"/>
+            <a:ext cx="7589520" cy="548640"/>
+          </a:xfrm>
+          <a:prstGeom prst="rect">
+            <a:avLst/>
+          </a:prstGeom>
+          <a:noFill/>
+        </p:spPr>
+        <p:txBody>
+          <a:bodyPr wrap="square" anchor="t" lIns="0" rIns="0" tIns="0" bIns="0">
+            <a:spAutoFit/>
+          </a:bodyPr>
+          <a:lstStyle/>
+          <a:p>
+            <a:pPr algn="l">
+              <a:lnSpc>
+                <a:spcPct val="125000"/>
+              </a:lnSpc>
+              <a:spcAft>
+                <a:spcPts val="400"/>
+              </a:spcAft>
+            </a:pPr>
+            <a:r>
+              <a:rPr sz="1250" b="0">
+                <a:solidFill>
+                  <a:srgbClr val="8FA3C0"/>
+                </a:solidFill>
+                <a:latin typeface="Segoe UI"/>
+              </a:rPr>
+              <a:t>The dynamic sandbox with runtime hooking needs an instrumented Android image; it cannot ship self-contained.</a:t>
+            </a:r>
+          </a:p>
+        </p:txBody>
+      </p:sp>
+      <p:sp>
+        <p:nvSpPr>
+          <p:cNvPr id="10" name="TextBox 9"/>
+          <p:cNvSpPr txBox="1"/>
+          <p:nvPr/>
+        </p:nvSpPr>
+        <p:spPr>
+          <a:xfrm>
+            <a:off x="640080" y="2816352"/>
+            <a:ext cx="3108960" cy="320040"/>
+          </a:xfrm>
+          <a:prstGeom prst="rect">
+            <a:avLst/>
+          </a:prstGeom>
+          <a:noFill/>
+        </p:spPr>
+        <p:txBody>
+          <a:bodyPr wrap="square" anchor="t" lIns="0" rIns="0" tIns="0" bIns="0">
+            <a:spAutoFit/>
+          </a:bodyPr>
+          <a:lstStyle/>
+          <a:p>
+            <a:pPr algn="l">
+              <a:lnSpc>
+                <a:spcPct val="115000"/>
+              </a:lnSpc>
+              <a:spcAft>
+                <a:spcPts val="400"/>
+              </a:spcAft>
+            </a:pPr>
+            <a:r>
+              <a:rPr sz="1350" b="1">
+                <a:solidFill>
+                  <a:srgbClr val="FF8C42"/>
+                </a:solidFill>
+                <a:latin typeface="Segoe UI"/>
+              </a:rPr>
+              <a:t>Graph layers are not real-time</a:t>
+            </a:r>
+          </a:p>
+        </p:txBody>
+      </p:sp>
+      <p:sp>
+        <p:nvSpPr>
+          <p:cNvPr id="11" name="TextBox 10"/>
+          <p:cNvSpPr txBox="1"/>
+          <p:nvPr/>
+        </p:nvSpPr>
+        <p:spPr>
+          <a:xfrm>
+            <a:off x="3931920" y="2816352"/>
+            <a:ext cx="7589520" cy="548640"/>
+          </a:xfrm>
+          <a:prstGeom prst="rect">
+            <a:avLst/>
+          </a:prstGeom>
+          <a:noFill/>
+        </p:spPr>
+        <p:txBody>
+          <a:bodyPr wrap="square" anchor="t" lIns="0" rIns="0" tIns="0" bIns="0">
+            <a:spAutoFit/>
+          </a:bodyPr>
+          <a:lstStyle/>
+          <a:p>
+            <a:pPr algn="l">
+              <a:lnSpc>
+                <a:spcPct val="125000"/>
+              </a:lnSpc>
+              <a:spcAft>
+                <a:spcPts val="400"/>
+              </a:spcAft>
+            </a:pPr>
+            <a:r>
+              <a:rPr sz="1250" b="0">
+                <a:solidFill>
+                  <a:srgbClr val="8FA3C0"/>
+                </a:solidFill>
+                <a:latin typeface="Segoe UI"/>
+              </a:rPr>
+              <a:t>~38 s full re-score. An account whose neighbourhood changed since the last batch is scored on slightly stale structure.</a:t>
+            </a:r>
+          </a:p>
+        </p:txBody>
+      </p:sp>
+      <p:sp>
+        <p:nvSpPr>
+          <p:cNvPr id="12" name="TextBox 11"/>
+          <p:cNvSpPr txBox="1"/>
+          <p:nvPr/>
+        </p:nvSpPr>
+        <p:spPr>
+          <a:xfrm>
+            <a:off x="640080" y="3529584"/>
+            <a:ext cx="3108960" cy="320040"/>
+          </a:xfrm>
+          <a:prstGeom prst="rect">
+            <a:avLst/>
+          </a:prstGeom>
+          <a:noFill/>
+        </p:spPr>
+        <p:txBody>
+          <a:bodyPr wrap="square" anchor="t" lIns="0" rIns="0" tIns="0" bIns="0">
+            <a:spAutoFit/>
+          </a:bodyPr>
+          <a:lstStyle/>
+          <a:p>
+            <a:pPr algn="l">
+              <a:lnSpc>
+                <a:spcPct val="115000"/>
+              </a:lnSpc>
+              <a:spcAft>
+                <a:spcPts val="400"/>
+              </a:spcAft>
+            </a:pPr>
+            <a:r>
+              <a:rPr sz="1350" b="1">
+                <a:solidFill>
+                  <a:srgbClr val="FF8C42"/>
+                </a:solidFill>
+                <a:latin typeface="Segoe UI"/>
+              </a:rPr>
+              <a:t>Single-institution view</a:t>
+            </a:r>
+          </a:p>
+        </p:txBody>
+      </p:sp>
+      <p:sp>
+        <p:nvSpPr>
+          <p:cNvPr id="13" name="TextBox 12"/>
+          <p:cNvSpPr txBox="1"/>
+          <p:nvPr/>
+        </p:nvSpPr>
+        <p:spPr>
+          <a:xfrm>
+            <a:off x="3931920" y="3529584"/>
+            <a:ext cx="7589520" cy="548640"/>
+          </a:xfrm>
+          <a:prstGeom prst="rect">
+            <a:avLst/>
+          </a:prstGeom>
+          <a:noFill/>
+        </p:spPr>
+        <p:txBody>
+          <a:bodyPr wrap="square" anchor="t" lIns="0" rIns="0" tIns="0" bIns="0">
+            <a:spAutoFit/>
+          </a:bodyPr>
+          <a:lstStyle/>
+          <a:p>
+            <a:pPr algn="l">
+              <a:lnSpc>
+                <a:spcPct val="125000"/>
+              </a:lnSpc>
+              <a:spcAft>
+                <a:spcPts val="400"/>
+              </a:spcAft>
+            </a:pPr>
+            <a:r>
+              <a:rPr sz="1250" b="0">
+                <a:solidFill>
+                  <a:srgbClr val="8FA3C0"/>
+                </a:solidFill>
+                <a:latin typeface="Segoe UI"/>
+              </a:rPr>
+              <a:t>Rings routing through several banks are only partly visible — a data-sharing problem, not a modelling one.</a:t>
+            </a:r>
+          </a:p>
+        </p:txBody>
+      </p:sp>
+      <p:sp>
+        <p:nvSpPr>
+          <p:cNvPr id="14" name="TextBox 13"/>
+          <p:cNvSpPr txBox="1"/>
+          <p:nvPr/>
+        </p:nvSpPr>
+        <p:spPr>
+          <a:xfrm>
+            <a:off x="640080" y="4242816"/>
+            <a:ext cx="3108960" cy="320040"/>
+          </a:xfrm>
+          <a:prstGeom prst="rect">
+            <a:avLst/>
+          </a:prstGeom>
+          <a:noFill/>
+        </p:spPr>
+        <p:txBody>
+          <a:bodyPr wrap="square" anchor="t" lIns="0" rIns="0" tIns="0" bIns="0">
+            <a:spAutoFit/>
+          </a:bodyPr>
+          <a:lstStyle/>
+          <a:p>
+            <a:pPr algn="l">
+              <a:lnSpc>
+                <a:spcPct val="115000"/>
+              </a:lnSpc>
+              <a:spcAft>
+                <a:spcPts val="400"/>
+              </a:spcAft>
+            </a:pPr>
+            <a:r>
+              <a:rPr sz="1350" b="1">
+                <a:solidFill>
+                  <a:srgbClr val="FF8C42"/>
+                </a:solidFill>
+                <a:latin typeface="Segoe UI"/>
+              </a:rPr>
+              <a:t>Cold start</a:t>
+            </a:r>
+          </a:p>
+        </p:txBody>
+      </p:sp>
+      <p:sp>
+        <p:nvSpPr>
+          <p:cNvPr id="15" name="TextBox 14"/>
+          <p:cNvSpPr txBox="1"/>
+          <p:nvPr/>
+        </p:nvSpPr>
+        <p:spPr>
+          <a:xfrm>
+            <a:off x="3931920" y="4242816"/>
+            <a:ext cx="7589520" cy="548640"/>
+          </a:xfrm>
+          <a:prstGeom prst="rect">
+            <a:avLst/>
+          </a:prstGeom>
+          <a:noFill/>
+        </p:spPr>
+        <p:txBody>
+          <a:bodyPr wrap="square" anchor="t" lIns="0" rIns="0" tIns="0" bIns="0">
+            <a:spAutoFit/>
+          </a:bodyPr>
+          <a:lstStyle/>
+          <a:p>
+            <a:pPr algn="l">
+              <a:lnSpc>
+                <a:spcPct val="125000"/>
+              </a:lnSpc>
+              <a:spcAft>
+                <a:spcPts val="400"/>
+              </a:spcAft>
+            </a:pPr>
+            <a:r>
+              <a:rPr sz="1250" b="0">
+                <a:solidFill>
+                  <a:srgbClr val="8FA3C0"/>
+                </a:solidFill>
+                <a:latin typeface="Segoe UI"/>
+              </a:rPr>
+              <a:t>The strongest feature is neighbourhood risk propagated from confirmed cases; with zero known mules performance drops materially.</a:t>
+            </a:r>
+          </a:p>
+        </p:txBody>
+      </p:sp>
+      <p:sp>
+        <p:nvSpPr>
+          <p:cNvPr id="16" name="TextBox 15"/>
+          <p:cNvSpPr txBox="1"/>
+          <p:nvPr/>
+        </p:nvSpPr>
+        <p:spPr>
+          <a:xfrm>
+            <a:off x="640080" y="4956048"/>
+            <a:ext cx="3108960" cy="320040"/>
+          </a:xfrm>
+          <a:prstGeom prst="rect">
+            <a:avLst/>
+          </a:prstGeom>
+          <a:noFill/>
+        </p:spPr>
+        <p:txBody>
+          <a:bodyPr wrap="square" anchor="t" lIns="0" rIns="0" tIns="0" bIns="0">
+            <a:spAutoFit/>
+          </a:bodyPr>
+          <a:lstStyle/>
+          <a:p>
+            <a:pPr algn="l">
+              <a:lnSpc>
+                <a:spcPct val="115000"/>
+              </a:lnSpc>
+              <a:spcAft>
+                <a:spcPts val="400"/>
+              </a:spcAft>
+            </a:pPr>
+            <a:r>
+              <a:rPr sz="1350" b="1">
+                <a:solidFill>
+                  <a:srgbClr val="FF8C42"/>
+                </a:solidFill>
+                <a:latin typeface="Segoe UI"/>
+              </a:rPr>
+              <a:t>Disparate impact unevaluated</a:t>
+            </a:r>
+          </a:p>
+        </p:txBody>
+      </p:sp>
+      <p:sp>
+        <p:nvSpPr>
+          <p:cNvPr id="17" name="TextBox 16"/>
+          <p:cNvSpPr txBox="1"/>
+          <p:nvPr/>
+        </p:nvSpPr>
+        <p:spPr>
+          <a:xfrm>
+            <a:off x="3931920" y="4956048"/>
+            <a:ext cx="7589520" cy="548640"/>
+          </a:xfrm>
+          <a:prstGeom prst="rect">
+            <a:avLst/>
+          </a:prstGeom>
+          <a:noFill/>
+        </p:spPr>
+        <p:txBody>
+          <a:bodyPr wrap="square" anchor="t" lIns="0" rIns="0" tIns="0" bIns="0">
+            <a:spAutoFit/>
+          </a:bodyPr>
+          <a:lstStyle/>
+          <a:p>
+            <a:pPr algn="l">
+              <a:lnSpc>
+                <a:spcPct val="125000"/>
+              </a:lnSpc>
+              <a:spcAft>
+                <a:spcPts val="400"/>
+              </a:spcAft>
+            </a:pPr>
+            <a:r>
+              <a:rPr sz="1250" b="0">
+                <a:solidFill>
+                  <a:srgbClr val="8FA3C0"/>
+                </a:solidFill>
+                <a:latin typeface="Segoe UI"/>
+              </a:rPr>
+              <a:t>Minimum-KYC and shared-device features are predictive but correlate with lower-income households. Alert-rate parity must be measured before go-live.</a:t>
+            </a:r>
+          </a:p>
+        </p:txBody>
+      </p:sp>
+      <p:sp>
+        <p:nvSpPr>
+          <p:cNvPr id="18" name="TextBox 17"/>
+          <p:cNvSpPr txBox="1"/>
+          <p:nvPr/>
+        </p:nvSpPr>
+        <p:spPr>
+          <a:xfrm>
+            <a:off x="640080" y="6400800"/>
+            <a:ext cx="8229600" cy="274320"/>
+          </a:xfrm>
+          <a:prstGeom prst="rect">
+            <a:avLst/>
+          </a:prstGeom>
+          <a:noFill/>
+        </p:spPr>
+        <p:txBody>
+          <a:bodyPr wrap="square" anchor="t" lIns="0" rIns="0" tIns="0" bIns="0">
+            <a:spAutoFit/>
+          </a:bodyPr>
+          <a:lstStyle/>
+          <a:p>
+            <a:pPr algn="l">
+              <a:lnSpc>
+                <a:spcPct val="115000"/>
+              </a:lnSpc>
+              <a:spcAft>
+                <a:spcPts val="400"/>
+              </a:spcAft>
+            </a:pPr>
+            <a:r>
+              <a:rPr sz="950" b="0">
+                <a:solidFill>
+                  <a:srgbClr val="61708A"/>
+                </a:solidFill>
+                <a:latin typeface="Segoe UI"/>
+              </a:rPr>
+              <a:t>BODHI MULE HUNTER AI  ·  CyberShield Hackathon 2026  ·  Problem Statement 2</a:t>
+            </a:r>
+          </a:p>
+        </p:txBody>
+      </p:sp>
+      <p:sp>
+        <p:nvSpPr>
+          <p:cNvPr id="19" name="TextBox 18"/>
+          <p:cNvSpPr txBox="1"/>
+          <p:nvPr/>
+        </p:nvSpPr>
+        <p:spPr>
+          <a:xfrm>
+            <a:off x="10728655" y="6400800"/>
+            <a:ext cx="822960" cy="274320"/>
+          </a:xfrm>
+          <a:prstGeom prst="rect">
+            <a:avLst/>
+          </a:prstGeom>
+          <a:noFill/>
+        </p:spPr>
+        <p:txBody>
+          <a:bodyPr wrap="square" anchor="t" lIns="0" rIns="0" tIns="0" bIns="0">
+            <a:spAutoFit/>
+          </a:bodyPr>
+          <a:lstStyle/>
+          <a:p>
+            <a:pPr algn="r">
+              <a:lnSpc>
+                <a:spcPct val="115000"/>
+              </a:lnSpc>
+              <a:spcAft>
+                <a:spcPts val="400"/>
+              </a:spcAft>
+            </a:pPr>
+            <a:r>
+              <a:rPr sz="950" b="0">
+                <a:solidFill>
+                  <a:srgbClr val="61708A"/>
+                </a:solidFill>
+                <a:latin typeface="Segoe UI"/>
+              </a:rPr>
+              <a:t>18 / 19</a:t>
+            </a:r>
+          </a:p>
+        </p:txBody>
+      </p:sp>
+    </p:spTree>
+  </p:cSld>
+  <p:clrMapOvr>
+    <a:masterClrMapping/>
+  </p:clrMapOvr>
+</p:sld>
+</file>
+
+<file path=ppt/slides/slide19.xml><?xml version="1.0" encoding="utf-8"?>
+<p:sld xmlns:a="http://schemas.openxmlformats.org/drawingml/2006/main" xmlns:p="http://schemas.openxmlformats.org/presentationml/2006/main" xmlns:r="http://schemas.openxmlformats.org/officeDocument/2006/relationships">
+  <p:cSld>
+    <p:spTree>
+      <p:nvGrpSpPr>
+        <p:cNvPr id="1" name=""/>
+        <p:cNvGrpSpPr/>
+        <p:nvPr/>
+      </p:nvGrpSpPr>
+      <p:grpSpPr/>
+      <p:sp>
+        <p:nvSpPr>
+          <p:cNvPr id="2" name="Rectangle 1"/>
+          <p:cNvSpPr/>
+          <p:nvPr/>
+        </p:nvSpPr>
+        <p:spPr>
+          <a:xfrm>
+            <a:off x="0" y="0"/>
+            <a:ext cx="12191695" cy="6858000"/>
+          </a:xfrm>
+          <a:prstGeom prst="rect">
+            <a:avLst/>
+          </a:prstGeom>
+          <a:solidFill>
+            <a:srgbClr val="0B0F17"/>
+          </a:solidFill>
+          <a:ln>
+            <a:noFill/>
+          </a:ln>
+          <a:effectLst/>
+        </p:spPr>
+        <p:style>
+          <a:lnRef idx="1">
+            <a:schemeClr val="accent1"/>
+          </a:lnRef>
+          <a:fillRef idx="3">
+            <a:schemeClr val="accent1"/>
+          </a:fillRef>
+          <a:effectRef idx="2">
+            <a:schemeClr val="accent1"/>
+          </a:effectRef>
+          <a:fontRef idx="minor">
+            <a:schemeClr val="lt1"/>
+          </a:fontRef>
+        </p:style>
+        <p:txBody>
+          <a:bodyPr rtlCol="0" anchor="ctr"/>
+          <a:lstStyle/>
+          <a:p>
+            <a:pPr algn="ctr"/>
+          </a:p>
+        </p:txBody>
+      </p:sp>
+      <p:sp>
+        <p:nvSpPr>
           <p:cNvPr id="3" name="Rounded Rectangle 2"/>
           <p:cNvSpPr/>
           <p:nvPr/>
@@ -12076,7 +14279,7 @@
                 </a:solidFill>
                 <a:latin typeface="Segoe UI"/>
               </a:rPr>
-              <a:t>85</a:t>
+              <a:t>113</a:t>
             </a:r>
           </a:p>
         </p:txBody>
@@ -12208,7 +14411,7 @@
                 </a:solidFill>
                 <a:latin typeface="Segoe UI"/>
               </a:rPr>
-              <a:t>~12.3k</a:t>
+              <a:t>~17.2k</a:t>
             </a:r>
           </a:p>
         </p:txBody>
@@ -14072,7 +16275,7 @@
                 </a:solidFill>
                 <a:latin typeface="Segoe UI"/>
               </a:rPr>
-              <a:t>2 / 18</a:t>
+              <a:t>2 / 19</a:t>
             </a:r>
           </a:p>
         </p:txBody>
@@ -14737,7 +16940,7 @@
                 </a:solidFill>
                 <a:latin typeface="Segoe UI"/>
               </a:rPr>
-              <a:t>3 / 18</a:t>
+              <a:t>3 / 19</a:t>
             </a:r>
           </a:p>
         </p:txBody>
@@ -16499,7 +18702,7 @@
                 </a:solidFill>
                 <a:latin typeface="Segoe UI"/>
               </a:rPr>
-              <a:t>4 / 18</a:t>
+              <a:t>4 / 19</a:t>
             </a:r>
           </a:p>
         </p:txBody>
@@ -18141,7 +20344,7 @@
                 </a:solidFill>
                 <a:latin typeface="Segoe UI"/>
               </a:rPr>
-              <a:t>5 / 18</a:t>
+              <a:t>5 / 19</a:t>
             </a:r>
           </a:p>
         </p:txBody>
@@ -19411,7 +21614,7 @@
                 </a:solidFill>
                 <a:latin typeface="Segoe UI"/>
               </a:rPr>
-              <a:t>6 / 18</a:t>
+              <a:t>6 / 19</a:t>
             </a:r>
           </a:p>
         </p:txBody>
@@ -21546,7 +23749,7 @@
                 </a:solidFill>
                 <a:latin typeface="Segoe UI"/>
               </a:rPr>
-              <a:t>7 / 18</a:t>
+              <a:t>7 / 19</a:t>
             </a:r>
           </a:p>
         </p:txBody>
@@ -22848,7 +25051,7 @@
                 </a:solidFill>
                 <a:latin typeface="Segoe UI"/>
               </a:rPr>
-              <a:t>8 / 18</a:t>
+              <a:t>8 / 19</a:t>
             </a:r>
           </a:p>
         </p:txBody>
@@ -24475,7 +26678,7 @@
                 </a:solidFill>
                 <a:latin typeface="Segoe UI"/>
               </a:rPr>
-              <a:t>9 / 18</a:t>
+              <a:t>9 / 19</a:t>
             </a:r>
           </a:p>
         </p:txBody>

--- a/docs/BODHI_Mule_Hunter_Deck.pptx
+++ b/docs/BODHI_Mule_Hunter_Deck.pptx
@@ -14411,7 +14411,7 @@
                 </a:solidFill>
                 <a:latin typeface="Segoe UI"/>
               </a:rPr>
-              <a:t>~17.2k</a:t>
+              <a:t>~17.3k</a:t>
             </a:r>
           </a:p>
         </p:txBody>
@@ -15095,7 +15095,7 @@
                 </a:solidFill>
                 <a:latin typeface="Consolas"/>
               </a:rPr>
-              <a:t>make setup &amp;&amp; make all &amp;&amp; make serve      ·      github.com/deepakvish001/BOI-Hackathon-Prototype-</a:t>
+              <a:t>make setup &amp;&amp; make all &amp;&amp; make serve      ·      every number on these slides is regenerated by that command</a:t>
             </a:r>
           </a:p>
         </p:txBody>

--- a/docs/BODHI_Mule_Hunter_Deck.pptx
+++ b/docs/BODHI_Mule_Hunter_Deck.pptx
@@ -15095,7 +15095,17 @@
                 </a:solidFill>
                 <a:latin typeface="Consolas"/>
               </a:rPr>
-              <a:t>make setup &amp;&amp; make all &amp;&amp; make serve      ·      every number on these slides is regenerated by that command</a:t>
+              <a:t>make setup &amp;&amp; make all &amp;&amp; make serve      ·      </a:t>
+            </a:r>
+            <a:r>
+              <a:rPr sz="1100">
+                <a:solidFill>
+                  <a:srgbClr val="4DA3FF"/>
+                </a:solidFill>
+                <a:latin typeface="Consolas"/>
+                <a:hlinkClick r:id="rId2"/>
+              </a:rPr>
+              <a:t>github.com/archirajpoot/Bodhi_Mule_Hunter</a:t>
             </a:r>
           </a:p>
         </p:txBody>

--- a/docs/BODHI_Mule_Hunter_Deck.pptx
+++ b/docs/BODHI_Mule_Hunter_Deck.pptx
@@ -4411,7 +4411,7 @@
         <p:spPr>
           <a:xfrm>
             <a:off x="822960" y="6272784"/>
-            <a:ext cx="10515600" cy="320040"/>
+            <a:ext cx="10515600" cy="274320"/>
           </a:xfrm>
           <a:prstGeom prst="rect">
             <a:avLst/>
@@ -4440,6 +4440,58 @@
                 <a:latin typeface="Segoe UI"/>
               </a:rPr>
               <a:t>Team BODHI   ·   CyberShield Hackathon 2026 - Problem Statement 2   ·   In association with Bank of India and IIT Hyderabad</a:t>
+            </a:r>
+          </a:p>
+        </p:txBody>
+      </p:sp>
+      <p:sp>
+        <p:nvSpPr>
+          <p:cNvPr id="33" name="TextBox 32"/>
+          <p:cNvSpPr txBox="1"/>
+          <p:nvPr/>
+        </p:nvSpPr>
+        <p:spPr>
+          <a:xfrm>
+            <a:off x="822960" y="6492240"/>
+            <a:ext cx="10515600" cy="274320"/>
+          </a:xfrm>
+          <a:prstGeom prst="rect">
+            <a:avLst/>
+          </a:prstGeom>
+          <a:noFill/>
+        </p:spPr>
+        <p:txBody>
+          <a:bodyPr wrap="square" anchor="t" lIns="0" rIns="0" tIns="0" bIns="0">
+            <a:spAutoFit/>
+          </a:bodyPr>
+          <a:lstStyle/>
+          <a:p>
+            <a:pPr algn="l">
+              <a:lnSpc>
+                <a:spcPct val="115000"/>
+              </a:lnSpc>
+              <a:spcAft>
+                <a:spcPts val="400"/>
+              </a:spcAft>
+            </a:pPr>
+            <a:r>
+              <a:rPr sz="1050" b="0">
+                <a:solidFill>
+                  <a:srgbClr val="61708A"/>
+                </a:solidFill>
+                <a:latin typeface="Consolas"/>
+              </a:rPr>
+              <a:t/>
+            </a:r>
+            <a:r>
+              <a:rPr sz="1050">
+                <a:solidFill>
+                  <a:srgbClr val="4DA3FF"/>
+                </a:solidFill>
+                <a:latin typeface="Consolas"/>
+                <a:hlinkClick r:id="rId2"/>
+              </a:rPr>
+              <a:t>github.com/archirajpoot/Bodhi_Mule_Hunter</a:t>
             </a:r>
           </a:p>
         </p:txBody>
@@ -6247,7 +6299,7 @@
         <p:spPr>
           <a:xfrm>
             <a:off x="640080" y="6400800"/>
-            <a:ext cx="8229600" cy="274320"/>
+            <a:ext cx="5852160" cy="274320"/>
           </a:xfrm>
           <a:prstGeom prst="rect">
             <a:avLst/>
@@ -6288,8 +6340,8 @@
         </p:nvSpPr>
         <p:spPr>
           <a:xfrm>
-            <a:off x="10728655" y="6400800"/>
-            <a:ext cx="822960" cy="274320"/>
+            <a:off x="6705295" y="6400800"/>
+            <a:ext cx="4846320" cy="274320"/>
           </a:xfrm>
           <a:prstGeom prst="rect">
             <a:avLst/>
@@ -6315,9 +6367,28 @@
                 <a:solidFill>
                   <a:srgbClr val="61708A"/>
                 </a:solidFill>
-                <a:latin typeface="Segoe UI"/>
-              </a:rPr>
-              <a:t>10 / 19</a:t>
+                <a:latin typeface="Consolas"/>
+              </a:rPr>
+              <a:t/>
+            </a:r>
+            <a:r>
+              <a:rPr sz="950">
+                <a:solidFill>
+                  <a:srgbClr val="61708A"/>
+                </a:solidFill>
+                <a:latin typeface="Consolas"/>
+                <a:hlinkClick r:id="rId2"/>
+              </a:rPr>
+              <a:t>github.com/archirajpoot/Bodhi_Mule_Hunter</a:t>
+            </a:r>
+            <a:r>
+              <a:rPr sz="950">
+                <a:solidFill>
+                  <a:srgbClr val="61708A"/>
+                </a:solidFill>
+                <a:latin typeface="Consolas"/>
+              </a:rPr>
+              <a:t>   ·   10 / 19</a:t>
             </a:r>
           </a:p>
         </p:txBody>
@@ -6592,7 +6663,7 @@
         <p:spPr>
           <a:xfrm>
             <a:off x="640080" y="6400800"/>
-            <a:ext cx="8229600" cy="274320"/>
+            <a:ext cx="5852160" cy="274320"/>
           </a:xfrm>
           <a:prstGeom prst="rect">
             <a:avLst/>
@@ -6633,8 +6704,8 @@
         </p:nvSpPr>
         <p:spPr>
           <a:xfrm>
-            <a:off x="10728655" y="6400800"/>
-            <a:ext cx="822960" cy="274320"/>
+            <a:off x="6705295" y="6400800"/>
+            <a:ext cx="4846320" cy="274320"/>
           </a:xfrm>
           <a:prstGeom prst="rect">
             <a:avLst/>
@@ -6660,9 +6731,28 @@
                 <a:solidFill>
                   <a:srgbClr val="61708A"/>
                 </a:solidFill>
-                <a:latin typeface="Segoe UI"/>
-              </a:rPr>
-              <a:t>11 / 19</a:t>
+                <a:latin typeface="Consolas"/>
+              </a:rPr>
+              <a:t/>
+            </a:r>
+            <a:r>
+              <a:rPr sz="950">
+                <a:solidFill>
+                  <a:srgbClr val="61708A"/>
+                </a:solidFill>
+                <a:latin typeface="Consolas"/>
+                <a:hlinkClick r:id="rId3"/>
+              </a:rPr>
+              <a:t>github.com/archirajpoot/Bodhi_Mule_Hunter</a:t>
+            </a:r>
+            <a:r>
+              <a:rPr sz="950">
+                <a:solidFill>
+                  <a:srgbClr val="61708A"/>
+                </a:solidFill>
+                <a:latin typeface="Consolas"/>
+              </a:rPr>
+              <a:t>   ·   11 / 19</a:t>
             </a:r>
           </a:p>
         </p:txBody>
@@ -7008,7 +7098,7 @@
         <p:spPr>
           <a:xfrm>
             <a:off x="640080" y="6400800"/>
-            <a:ext cx="8229600" cy="274320"/>
+            <a:ext cx="5852160" cy="274320"/>
           </a:xfrm>
           <a:prstGeom prst="rect">
             <a:avLst/>
@@ -7049,8 +7139,8 @@
         </p:nvSpPr>
         <p:spPr>
           <a:xfrm>
-            <a:off x="10728655" y="6400800"/>
-            <a:ext cx="822960" cy="274320"/>
+            <a:off x="6705295" y="6400800"/>
+            <a:ext cx="4846320" cy="274320"/>
           </a:xfrm>
           <a:prstGeom prst="rect">
             <a:avLst/>
@@ -7076,9 +7166,28 @@
                 <a:solidFill>
                   <a:srgbClr val="61708A"/>
                 </a:solidFill>
-                <a:latin typeface="Segoe UI"/>
-              </a:rPr>
-              <a:t>12 / 19</a:t>
+                <a:latin typeface="Consolas"/>
+              </a:rPr>
+              <a:t/>
+            </a:r>
+            <a:r>
+              <a:rPr sz="950">
+                <a:solidFill>
+                  <a:srgbClr val="61708A"/>
+                </a:solidFill>
+                <a:latin typeface="Consolas"/>
+                <a:hlinkClick r:id="rId4"/>
+              </a:rPr>
+              <a:t>github.com/archirajpoot/Bodhi_Mule_Hunter</a:t>
+            </a:r>
+            <a:r>
+              <a:rPr sz="950">
+                <a:solidFill>
+                  <a:srgbClr val="61708A"/>
+                </a:solidFill>
+                <a:latin typeface="Consolas"/>
+              </a:rPr>
+              <a:t>   ·   12 / 19</a:t>
             </a:r>
           </a:p>
         </p:txBody>
@@ -7486,7 +7595,7 @@
         <p:spPr>
           <a:xfrm>
             <a:off x="640080" y="6400800"/>
-            <a:ext cx="8229600" cy="274320"/>
+            <a:ext cx="5852160" cy="274320"/>
           </a:xfrm>
           <a:prstGeom prst="rect">
             <a:avLst/>
@@ -7527,8 +7636,8 @@
         </p:nvSpPr>
         <p:spPr>
           <a:xfrm>
-            <a:off x="10728655" y="6400800"/>
-            <a:ext cx="822960" cy="274320"/>
+            <a:off x="6705295" y="6400800"/>
+            <a:ext cx="4846320" cy="274320"/>
           </a:xfrm>
           <a:prstGeom prst="rect">
             <a:avLst/>
@@ -7554,9 +7663,28 @@
                 <a:solidFill>
                   <a:srgbClr val="61708A"/>
                 </a:solidFill>
-                <a:latin typeface="Segoe UI"/>
-              </a:rPr>
-              <a:t>13 / 19</a:t>
+                <a:latin typeface="Consolas"/>
+              </a:rPr>
+              <a:t/>
+            </a:r>
+            <a:r>
+              <a:rPr sz="950">
+                <a:solidFill>
+                  <a:srgbClr val="61708A"/>
+                </a:solidFill>
+                <a:latin typeface="Consolas"/>
+                <a:hlinkClick r:id="rId3"/>
+              </a:rPr>
+              <a:t>github.com/archirajpoot/Bodhi_Mule_Hunter</a:t>
+            </a:r>
+            <a:r>
+              <a:rPr sz="950">
+                <a:solidFill>
+                  <a:srgbClr val="61708A"/>
+                </a:solidFill>
+                <a:latin typeface="Consolas"/>
+              </a:rPr>
+              <a:t>   ·   13 / 19</a:t>
             </a:r>
           </a:p>
         </p:txBody>
@@ -8533,7 +8661,7 @@
         <p:spPr>
           <a:xfrm>
             <a:off x="640080" y="6400800"/>
-            <a:ext cx="8229600" cy="274320"/>
+            <a:ext cx="5852160" cy="274320"/>
           </a:xfrm>
           <a:prstGeom prst="rect">
             <a:avLst/>
@@ -8574,8 +8702,8 @@
         </p:nvSpPr>
         <p:spPr>
           <a:xfrm>
-            <a:off x="10728655" y="6400800"/>
-            <a:ext cx="822960" cy="274320"/>
+            <a:off x="6705295" y="6400800"/>
+            <a:ext cx="4846320" cy="274320"/>
           </a:xfrm>
           <a:prstGeom prst="rect">
             <a:avLst/>
@@ -8601,9 +8729,28 @@
                 <a:solidFill>
                   <a:srgbClr val="61708A"/>
                 </a:solidFill>
-                <a:latin typeface="Segoe UI"/>
-              </a:rPr>
-              <a:t>14 / 19</a:t>
+                <a:latin typeface="Consolas"/>
+              </a:rPr>
+              <a:t/>
+            </a:r>
+            <a:r>
+              <a:rPr sz="950">
+                <a:solidFill>
+                  <a:srgbClr val="61708A"/>
+                </a:solidFill>
+                <a:latin typeface="Consolas"/>
+                <a:hlinkClick r:id="rId3"/>
+              </a:rPr>
+              <a:t>github.com/archirajpoot/Bodhi_Mule_Hunter</a:t>
+            </a:r>
+            <a:r>
+              <a:rPr sz="950">
+                <a:solidFill>
+                  <a:srgbClr val="61708A"/>
+                </a:solidFill>
+                <a:latin typeface="Consolas"/>
+              </a:rPr>
+              <a:t>   ·   14 / 19</a:t>
             </a:r>
           </a:p>
         </p:txBody>
@@ -9382,7 +9529,7 @@
         <p:spPr>
           <a:xfrm>
             <a:off x="640080" y="6400800"/>
-            <a:ext cx="8229600" cy="274320"/>
+            <a:ext cx="5852160" cy="274320"/>
           </a:xfrm>
           <a:prstGeom prst="rect">
             <a:avLst/>
@@ -9423,8 +9570,8 @@
         </p:nvSpPr>
         <p:spPr>
           <a:xfrm>
-            <a:off x="10728655" y="6400800"/>
-            <a:ext cx="822960" cy="274320"/>
+            <a:off x="6705295" y="6400800"/>
+            <a:ext cx="4846320" cy="274320"/>
           </a:xfrm>
           <a:prstGeom prst="rect">
             <a:avLst/>
@@ -9450,9 +9597,28 @@
                 <a:solidFill>
                   <a:srgbClr val="61708A"/>
                 </a:solidFill>
-                <a:latin typeface="Segoe UI"/>
-              </a:rPr>
-              <a:t>15 / 19</a:t>
+                <a:latin typeface="Consolas"/>
+              </a:rPr>
+              <a:t/>
+            </a:r>
+            <a:r>
+              <a:rPr sz="950">
+                <a:solidFill>
+                  <a:srgbClr val="61708A"/>
+                </a:solidFill>
+                <a:latin typeface="Consolas"/>
+                <a:hlinkClick r:id="rId3"/>
+              </a:rPr>
+              <a:t>github.com/archirajpoot/Bodhi_Mule_Hunter</a:t>
+            </a:r>
+            <a:r>
+              <a:rPr sz="950">
+                <a:solidFill>
+                  <a:srgbClr val="61708A"/>
+                </a:solidFill>
+                <a:latin typeface="Consolas"/>
+              </a:rPr>
+              <a:t>   ·   15 / 19</a:t>
             </a:r>
           </a:p>
         </p:txBody>
@@ -10906,7 +11072,7 @@
         <p:spPr>
           <a:xfrm>
             <a:off x="640080" y="6400800"/>
-            <a:ext cx="8229600" cy="274320"/>
+            <a:ext cx="5852160" cy="274320"/>
           </a:xfrm>
           <a:prstGeom prst="rect">
             <a:avLst/>
@@ -10947,8 +11113,8 @@
         </p:nvSpPr>
         <p:spPr>
           <a:xfrm>
-            <a:off x="10728655" y="6400800"/>
-            <a:ext cx="822960" cy="274320"/>
+            <a:off x="6705295" y="6400800"/>
+            <a:ext cx="4846320" cy="274320"/>
           </a:xfrm>
           <a:prstGeom prst="rect">
             <a:avLst/>
@@ -10974,9 +11140,28 @@
                 <a:solidFill>
                   <a:srgbClr val="61708A"/>
                 </a:solidFill>
-                <a:latin typeface="Segoe UI"/>
-              </a:rPr>
-              <a:t>16 / 19</a:t>
+                <a:latin typeface="Consolas"/>
+              </a:rPr>
+              <a:t/>
+            </a:r>
+            <a:r>
+              <a:rPr sz="950">
+                <a:solidFill>
+                  <a:srgbClr val="61708A"/>
+                </a:solidFill>
+                <a:latin typeface="Consolas"/>
+                <a:hlinkClick r:id="rId2"/>
+              </a:rPr>
+              <a:t>github.com/archirajpoot/Bodhi_Mule_Hunter</a:t>
+            </a:r>
+            <a:r>
+              <a:rPr sz="950">
+                <a:solidFill>
+                  <a:srgbClr val="61708A"/>
+                </a:solidFill>
+                <a:latin typeface="Consolas"/>
+              </a:rPr>
+              <a:t>   ·   16 / 19</a:t>
             </a:r>
           </a:p>
         </p:txBody>
@@ -13108,7 +13293,7 @@
         <p:spPr>
           <a:xfrm>
             <a:off x="640080" y="6400800"/>
-            <a:ext cx="8229600" cy="274320"/>
+            <a:ext cx="5852160" cy="274320"/>
           </a:xfrm>
           <a:prstGeom prst="rect">
             <a:avLst/>
@@ -13149,8 +13334,8 @@
         </p:nvSpPr>
         <p:spPr>
           <a:xfrm>
-            <a:off x="10728655" y="6400800"/>
-            <a:ext cx="822960" cy="274320"/>
+            <a:off x="6705295" y="6400800"/>
+            <a:ext cx="4846320" cy="274320"/>
           </a:xfrm>
           <a:prstGeom prst="rect">
             <a:avLst/>
@@ -13176,9 +13361,28 @@
                 <a:solidFill>
                   <a:srgbClr val="61708A"/>
                 </a:solidFill>
-                <a:latin typeface="Segoe UI"/>
-              </a:rPr>
-              <a:t>17 / 19</a:t>
+                <a:latin typeface="Consolas"/>
+              </a:rPr>
+              <a:t/>
+            </a:r>
+            <a:r>
+              <a:rPr sz="950">
+                <a:solidFill>
+                  <a:srgbClr val="61708A"/>
+                </a:solidFill>
+                <a:latin typeface="Consolas"/>
+                <a:hlinkClick r:id="rId2"/>
+              </a:rPr>
+              <a:t>github.com/archirajpoot/Bodhi_Mule_Hunter</a:t>
+            </a:r>
+            <a:r>
+              <a:rPr sz="950">
+                <a:solidFill>
+                  <a:srgbClr val="61708A"/>
+                </a:solidFill>
+                <a:latin typeface="Consolas"/>
+              </a:rPr>
+              <a:t>   ·   17 / 19</a:t>
             </a:r>
           </a:p>
         </p:txBody>
@@ -13886,7 +14090,7 @@
         <p:spPr>
           <a:xfrm>
             <a:off x="640080" y="6400800"/>
-            <a:ext cx="8229600" cy="274320"/>
+            <a:ext cx="5852160" cy="274320"/>
           </a:xfrm>
           <a:prstGeom prst="rect">
             <a:avLst/>
@@ -13927,8 +14131,8 @@
         </p:nvSpPr>
         <p:spPr>
           <a:xfrm>
-            <a:off x="10728655" y="6400800"/>
-            <a:ext cx="822960" cy="274320"/>
+            <a:off x="6705295" y="6400800"/>
+            <a:ext cx="4846320" cy="274320"/>
           </a:xfrm>
           <a:prstGeom prst="rect">
             <a:avLst/>
@@ -13954,9 +14158,28 @@
                 <a:solidFill>
                   <a:srgbClr val="61708A"/>
                 </a:solidFill>
-                <a:latin typeface="Segoe UI"/>
-              </a:rPr>
-              <a:t>18 / 19</a:t>
+                <a:latin typeface="Consolas"/>
+              </a:rPr>
+              <a:t/>
+            </a:r>
+            <a:r>
+              <a:rPr sz="950">
+                <a:solidFill>
+                  <a:srgbClr val="61708A"/>
+                </a:solidFill>
+                <a:latin typeface="Consolas"/>
+                <a:hlinkClick r:id="rId2"/>
+              </a:rPr>
+              <a:t>github.com/archirajpoot/Bodhi_Mule_Hunter</a:t>
+            </a:r>
+            <a:r>
+              <a:rPr sz="950">
+                <a:solidFill>
+                  <a:srgbClr val="61708A"/>
+                </a:solidFill>
+                <a:latin typeface="Consolas"/>
+              </a:rPr>
+              <a:t>   ·   18 / 19</a:t>
             </a:r>
           </a:p>
         </p:txBody>
@@ -14411,7 +14634,7 @@
                 </a:solidFill>
                 <a:latin typeface="Segoe UI"/>
               </a:rPr>
-              <a:t>~17.3k</a:t>
+              <a:t>~17.4k</a:t>
             </a:r>
           </a:p>
         </p:txBody>
@@ -16215,7 +16438,7 @@
         <p:spPr>
           <a:xfrm>
             <a:off x="640080" y="6400800"/>
-            <a:ext cx="8229600" cy="274320"/>
+            <a:ext cx="5852160" cy="274320"/>
           </a:xfrm>
           <a:prstGeom prst="rect">
             <a:avLst/>
@@ -16256,8 +16479,8 @@
         </p:nvSpPr>
         <p:spPr>
           <a:xfrm>
-            <a:off x="10728655" y="6400800"/>
-            <a:ext cx="822960" cy="274320"/>
+            <a:off x="6705295" y="6400800"/>
+            <a:ext cx="4846320" cy="274320"/>
           </a:xfrm>
           <a:prstGeom prst="rect">
             <a:avLst/>
@@ -16283,9 +16506,28 @@
                 <a:solidFill>
                   <a:srgbClr val="61708A"/>
                 </a:solidFill>
-                <a:latin typeface="Segoe UI"/>
-              </a:rPr>
-              <a:t>2 / 19</a:t>
+                <a:latin typeface="Consolas"/>
+              </a:rPr>
+              <a:t/>
+            </a:r>
+            <a:r>
+              <a:rPr sz="950">
+                <a:solidFill>
+                  <a:srgbClr val="61708A"/>
+                </a:solidFill>
+                <a:latin typeface="Consolas"/>
+                <a:hlinkClick r:id="rId2"/>
+              </a:rPr>
+              <a:t>github.com/archirajpoot/Bodhi_Mule_Hunter</a:t>
+            </a:r>
+            <a:r>
+              <a:rPr sz="950">
+                <a:solidFill>
+                  <a:srgbClr val="61708A"/>
+                </a:solidFill>
+                <a:latin typeface="Consolas"/>
+              </a:rPr>
+              <a:t>   ·   2 / 19</a:t>
             </a:r>
           </a:p>
         </p:txBody>
@@ -16880,7 +17122,7 @@
         <p:spPr>
           <a:xfrm>
             <a:off x="640080" y="6400800"/>
-            <a:ext cx="8229600" cy="274320"/>
+            <a:ext cx="5852160" cy="274320"/>
           </a:xfrm>
           <a:prstGeom prst="rect">
             <a:avLst/>
@@ -16921,8 +17163,8 @@
         </p:nvSpPr>
         <p:spPr>
           <a:xfrm>
-            <a:off x="10728655" y="6400800"/>
-            <a:ext cx="822960" cy="274320"/>
+            <a:off x="6705295" y="6400800"/>
+            <a:ext cx="4846320" cy="274320"/>
           </a:xfrm>
           <a:prstGeom prst="rect">
             <a:avLst/>
@@ -16948,9 +17190,28 @@
                 <a:solidFill>
                   <a:srgbClr val="61708A"/>
                 </a:solidFill>
-                <a:latin typeface="Segoe UI"/>
-              </a:rPr>
-              <a:t>3 / 19</a:t>
+                <a:latin typeface="Consolas"/>
+              </a:rPr>
+              <a:t/>
+            </a:r>
+            <a:r>
+              <a:rPr sz="950">
+                <a:solidFill>
+                  <a:srgbClr val="61708A"/>
+                </a:solidFill>
+                <a:latin typeface="Consolas"/>
+                <a:hlinkClick r:id="rId2"/>
+              </a:rPr>
+              <a:t>github.com/archirajpoot/Bodhi_Mule_Hunter</a:t>
+            </a:r>
+            <a:r>
+              <a:rPr sz="950">
+                <a:solidFill>
+                  <a:srgbClr val="61708A"/>
+                </a:solidFill>
+                <a:latin typeface="Consolas"/>
+              </a:rPr>
+              <a:t>   ·   3 / 19</a:t>
             </a:r>
           </a:p>
         </p:txBody>
@@ -18642,7 +18903,7 @@
         <p:spPr>
           <a:xfrm>
             <a:off x="640080" y="6400800"/>
-            <a:ext cx="8229600" cy="274320"/>
+            <a:ext cx="5852160" cy="274320"/>
           </a:xfrm>
           <a:prstGeom prst="rect">
             <a:avLst/>
@@ -18683,8 +18944,8 @@
         </p:nvSpPr>
         <p:spPr>
           <a:xfrm>
-            <a:off x="10728655" y="6400800"/>
-            <a:ext cx="822960" cy="274320"/>
+            <a:off x="6705295" y="6400800"/>
+            <a:ext cx="4846320" cy="274320"/>
           </a:xfrm>
           <a:prstGeom prst="rect">
             <a:avLst/>
@@ -18710,9 +18971,28 @@
                 <a:solidFill>
                   <a:srgbClr val="61708A"/>
                 </a:solidFill>
-                <a:latin typeface="Segoe UI"/>
-              </a:rPr>
-              <a:t>4 / 19</a:t>
+                <a:latin typeface="Consolas"/>
+              </a:rPr>
+              <a:t/>
+            </a:r>
+            <a:r>
+              <a:rPr sz="950">
+                <a:solidFill>
+                  <a:srgbClr val="61708A"/>
+                </a:solidFill>
+                <a:latin typeface="Consolas"/>
+                <a:hlinkClick r:id="rId2"/>
+              </a:rPr>
+              <a:t>github.com/archirajpoot/Bodhi_Mule_Hunter</a:t>
+            </a:r>
+            <a:r>
+              <a:rPr sz="950">
+                <a:solidFill>
+                  <a:srgbClr val="61708A"/>
+                </a:solidFill>
+                <a:latin typeface="Consolas"/>
+              </a:rPr>
+              <a:t>   ·   4 / 19</a:t>
             </a:r>
           </a:p>
         </p:txBody>
@@ -20284,7 +20564,7 @@
         <p:spPr>
           <a:xfrm>
             <a:off x="640080" y="6400800"/>
-            <a:ext cx="8229600" cy="274320"/>
+            <a:ext cx="5852160" cy="274320"/>
           </a:xfrm>
           <a:prstGeom prst="rect">
             <a:avLst/>
@@ -20325,8 +20605,8 @@
         </p:nvSpPr>
         <p:spPr>
           <a:xfrm>
-            <a:off x="10728655" y="6400800"/>
-            <a:ext cx="822960" cy="274320"/>
+            <a:off x="6705295" y="6400800"/>
+            <a:ext cx="4846320" cy="274320"/>
           </a:xfrm>
           <a:prstGeom prst="rect">
             <a:avLst/>
@@ -20352,9 +20632,28 @@
                 <a:solidFill>
                   <a:srgbClr val="61708A"/>
                 </a:solidFill>
-                <a:latin typeface="Segoe UI"/>
-              </a:rPr>
-              <a:t>5 / 19</a:t>
+                <a:latin typeface="Consolas"/>
+              </a:rPr>
+              <a:t/>
+            </a:r>
+            <a:r>
+              <a:rPr sz="950">
+                <a:solidFill>
+                  <a:srgbClr val="61708A"/>
+                </a:solidFill>
+                <a:latin typeface="Consolas"/>
+                <a:hlinkClick r:id="rId2"/>
+              </a:rPr>
+              <a:t>github.com/archirajpoot/Bodhi_Mule_Hunter</a:t>
+            </a:r>
+            <a:r>
+              <a:rPr sz="950">
+                <a:solidFill>
+                  <a:srgbClr val="61708A"/>
+                </a:solidFill>
+                <a:latin typeface="Consolas"/>
+              </a:rPr>
+              <a:t>   ·   5 / 19</a:t>
             </a:r>
           </a:p>
         </p:txBody>
@@ -21554,7 +21853,7 @@
         <p:spPr>
           <a:xfrm>
             <a:off x="640080" y="6400800"/>
-            <a:ext cx="8229600" cy="274320"/>
+            <a:ext cx="5852160" cy="274320"/>
           </a:xfrm>
           <a:prstGeom prst="rect">
             <a:avLst/>
@@ -21595,8 +21894,8 @@
         </p:nvSpPr>
         <p:spPr>
           <a:xfrm>
-            <a:off x="10728655" y="6400800"/>
-            <a:ext cx="822960" cy="274320"/>
+            <a:off x="6705295" y="6400800"/>
+            <a:ext cx="4846320" cy="274320"/>
           </a:xfrm>
           <a:prstGeom prst="rect">
             <a:avLst/>
@@ -21622,9 +21921,28 @@
                 <a:solidFill>
                   <a:srgbClr val="61708A"/>
                 </a:solidFill>
-                <a:latin typeface="Segoe UI"/>
-              </a:rPr>
-              <a:t>6 / 19</a:t>
+                <a:latin typeface="Consolas"/>
+              </a:rPr>
+              <a:t/>
+            </a:r>
+            <a:r>
+              <a:rPr sz="950">
+                <a:solidFill>
+                  <a:srgbClr val="61708A"/>
+                </a:solidFill>
+                <a:latin typeface="Consolas"/>
+                <a:hlinkClick r:id="rId2"/>
+              </a:rPr>
+              <a:t>github.com/archirajpoot/Bodhi_Mule_Hunter</a:t>
+            </a:r>
+            <a:r>
+              <a:rPr sz="950">
+                <a:solidFill>
+                  <a:srgbClr val="61708A"/>
+                </a:solidFill>
+                <a:latin typeface="Consolas"/>
+              </a:rPr>
+              <a:t>   ·   6 / 19</a:t>
             </a:r>
           </a:p>
         </p:txBody>
@@ -23689,7 +24007,7 @@
         <p:spPr>
           <a:xfrm>
             <a:off x="640080" y="6400800"/>
-            <a:ext cx="8229600" cy="274320"/>
+            <a:ext cx="5852160" cy="274320"/>
           </a:xfrm>
           <a:prstGeom prst="rect">
             <a:avLst/>
@@ -23730,8 +24048,8 @@
         </p:nvSpPr>
         <p:spPr>
           <a:xfrm>
-            <a:off x="10728655" y="6400800"/>
-            <a:ext cx="822960" cy="274320"/>
+            <a:off x="6705295" y="6400800"/>
+            <a:ext cx="4846320" cy="274320"/>
           </a:xfrm>
           <a:prstGeom prst="rect">
             <a:avLst/>
@@ -23757,9 +24075,28 @@
                 <a:solidFill>
                   <a:srgbClr val="61708A"/>
                 </a:solidFill>
-                <a:latin typeface="Segoe UI"/>
-              </a:rPr>
-              <a:t>7 / 19</a:t>
+                <a:latin typeface="Consolas"/>
+              </a:rPr>
+              <a:t/>
+            </a:r>
+            <a:r>
+              <a:rPr sz="950">
+                <a:solidFill>
+                  <a:srgbClr val="61708A"/>
+                </a:solidFill>
+                <a:latin typeface="Consolas"/>
+                <a:hlinkClick r:id="rId3"/>
+              </a:rPr>
+              <a:t>github.com/archirajpoot/Bodhi_Mule_Hunter</a:t>
+            </a:r>
+            <a:r>
+              <a:rPr sz="950">
+                <a:solidFill>
+                  <a:srgbClr val="61708A"/>
+                </a:solidFill>
+                <a:latin typeface="Consolas"/>
+              </a:rPr>
+              <a:t>   ·   7 / 19</a:t>
             </a:r>
           </a:p>
         </p:txBody>
@@ -24991,7 +25328,7 @@
         <p:spPr>
           <a:xfrm>
             <a:off x="640080" y="6400800"/>
-            <a:ext cx="8229600" cy="274320"/>
+            <a:ext cx="5852160" cy="274320"/>
           </a:xfrm>
           <a:prstGeom prst="rect">
             <a:avLst/>
@@ -25032,8 +25369,8 @@
         </p:nvSpPr>
         <p:spPr>
           <a:xfrm>
-            <a:off x="10728655" y="6400800"/>
-            <a:ext cx="822960" cy="274320"/>
+            <a:off x="6705295" y="6400800"/>
+            <a:ext cx="4846320" cy="274320"/>
           </a:xfrm>
           <a:prstGeom prst="rect">
             <a:avLst/>
@@ -25059,9 +25396,28 @@
                 <a:solidFill>
                   <a:srgbClr val="61708A"/>
                 </a:solidFill>
-                <a:latin typeface="Segoe UI"/>
-              </a:rPr>
-              <a:t>8 / 19</a:t>
+                <a:latin typeface="Consolas"/>
+              </a:rPr>
+              <a:t/>
+            </a:r>
+            <a:r>
+              <a:rPr sz="950">
+                <a:solidFill>
+                  <a:srgbClr val="61708A"/>
+                </a:solidFill>
+                <a:latin typeface="Consolas"/>
+                <a:hlinkClick r:id="rId2"/>
+              </a:rPr>
+              <a:t>github.com/archirajpoot/Bodhi_Mule_Hunter</a:t>
+            </a:r>
+            <a:r>
+              <a:rPr sz="950">
+                <a:solidFill>
+                  <a:srgbClr val="61708A"/>
+                </a:solidFill>
+                <a:latin typeface="Consolas"/>
+              </a:rPr>
+              <a:t>   ·   8 / 19</a:t>
             </a:r>
           </a:p>
         </p:txBody>
@@ -26618,7 +26974,7 @@
         <p:spPr>
           <a:xfrm>
             <a:off x="640080" y="6400800"/>
-            <a:ext cx="8229600" cy="274320"/>
+            <a:ext cx="5852160" cy="274320"/>
           </a:xfrm>
           <a:prstGeom prst="rect">
             <a:avLst/>
@@ -26659,8 +27015,8 @@
         </p:nvSpPr>
         <p:spPr>
           <a:xfrm>
-            <a:off x="10728655" y="6400800"/>
-            <a:ext cx="822960" cy="274320"/>
+            <a:off x="6705295" y="6400800"/>
+            <a:ext cx="4846320" cy="274320"/>
           </a:xfrm>
           <a:prstGeom prst="rect">
             <a:avLst/>
@@ -26686,9 +27042,28 @@
                 <a:solidFill>
                   <a:srgbClr val="61708A"/>
                 </a:solidFill>
-                <a:latin typeface="Segoe UI"/>
-              </a:rPr>
-              <a:t>9 / 19</a:t>
+                <a:latin typeface="Consolas"/>
+              </a:rPr>
+              <a:t/>
+            </a:r>
+            <a:r>
+              <a:rPr sz="950">
+                <a:solidFill>
+                  <a:srgbClr val="61708A"/>
+                </a:solidFill>
+                <a:latin typeface="Consolas"/>
+                <a:hlinkClick r:id="rId2"/>
+              </a:rPr>
+              <a:t>github.com/archirajpoot/Bodhi_Mule_Hunter</a:t>
+            </a:r>
+            <a:r>
+              <a:rPr sz="950">
+                <a:solidFill>
+                  <a:srgbClr val="61708A"/>
+                </a:solidFill>
+                <a:latin typeface="Consolas"/>
+              </a:rPr>
+              <a:t>   ·   9 / 19</a:t>
             </a:r>
           </a:p>
         </p:txBody>
